--- a/docs/review3/PrepLang_Review3_Presentation.pptx
+++ b/docs/review3/PrepLang_Review3_Presentation.pptx
@@ -18,9 +18,10 @@
     <p:sldId id="266" r:id="rId12"/>
     <p:sldId id="267" r:id="rId13"/>
     <p:sldId id="268" r:id="rId14"/>
+    <p:sldId id="269" r:id="rId15"/>
   </p:sldIdLst>
   <p:notesMasterIdLst>
-    <p:notesMasterId r:id="rId15"/>
+    <p:notesMasterId r:id="rId16"/>
   </p:notesMasterIdLst>
   <p:sldSz cx="9144000" cy="5143500"/>
   <p:notesSz cx="5143500" cy="9144000"/>
@@ -119,13 +120,13 @@
   <p:extLst>
     <p:ext uri="{521415D9-36F7-43E2-AB2F-B90AF26B5E84}">
       <p14:sectionLst xmlns:p14="http://schemas.microsoft.com/office/powerpoint/2010/main">
-        <p14:section name="Introduction" id="{92eb9203-95fa-e541-ebee-be9cd84517e3}">
+        <p14:section name="Introduction" id="{d976c1ff-c4e5-abb5-cbe4-72ef9d200d93}">
           <p14:sldIdLst>
             <p14:sldId id="256"/>
             <p14:sldId id="257"/>
           </p14:sldIdLst>
         </p14:section>
-        <p14:section name="Design" id="{08a44d5c-d2bb-72cb-5ddc-ef5fd39397b2}">
+        <p14:section name="Design" id="{8d9bd3f8-0b8f-7d89-0d3f-0685ba455c42}">
           <p14:sldIdLst>
             <p14:sldId id="258"/>
             <p14:sldId id="259"/>
@@ -133,19 +134,20 @@
             <p14:sldId id="261"/>
           </p14:sldIdLst>
         </p14:section>
-        <p14:section name="New in Phase 3" id="{08d080c2-6016-7583-1895-bf313026666a}">
+        <p14:section name="New in Phase 3" id="{c66ac1cc-dbf9-0c62-fdfb-6d35311db38b}">
           <p14:sldIdLst>
             <p14:sldId id="262"/>
             <p14:sldId id="263"/>
             <p14:sldId id="264"/>
             <p14:sldId id="265"/>
+            <p14:sldId id="266"/>
           </p14:sldIdLst>
         </p14:section>
-        <p14:section name="Results" id="{4c26d5ad-7007-d408-5b5d-bf84ff257281}">
+        <p14:section name="Results" id="{0852f5a6-16e2-c20e-f8ef-16bd5c65ea90}">
           <p14:sldIdLst>
-            <p14:sldId id="266"/>
             <p14:sldId id="267"/>
             <p14:sldId id="268"/>
+            <p14:sldId id="269"/>
           </p14:sldIdLst>
         </p14:section>
       </p14:sectionLst>
@@ -1393,6 +1395,94 @@
             <a:fld id="{F7021451-1387-4CA6-816F-3879F97B5CBC}" type="slidenum">
               <a:rPr lang="en-US"/>
               <a:t>13</a:t>
+            </a:fld>
+            <a:endParaRPr lang="en-US"/>
+          </a:p>
+        </p:txBody>
+      </p:sp>
+    </p:spTree>
+    <p:extLst>
+      <p:ext uri="{BB962C8B-B14F-4D97-AF65-F5344CB8AC3E}">
+        <p14:creationId xmlns:p14="http://schemas.microsoft.com/office/powerpoint/2010/main" val="1024086991"/>
+      </p:ext>
+    </p:extLst>
+  </p:cSld>
+  <p:clrMapOvr>
+    <a:masterClrMapping/>
+  </p:clrMapOvr>
+</p:notes>
+</file>
+
+<file path=ppt/notesSlides/notesSlide14.xml><?xml version="1.0" encoding="utf-8"?>
+<p:notes xmlns:a="http://schemas.openxmlformats.org/drawingml/2006/main" xmlns:r="http://schemas.openxmlformats.org/officeDocument/2006/relationships" xmlns:p="http://schemas.openxmlformats.org/presentationml/2006/main">
+  <p:cSld>
+    <p:spTree>
+      <p:nvGrpSpPr>
+        <p:cNvPr id="1" name=""/>
+        <p:cNvGrpSpPr/>
+        <p:nvPr/>
+      </p:nvGrpSpPr>
+      <p:grpSpPr>
+        <a:xfrm>
+          <a:off x="0" y="0"/>
+          <a:ext cx="0" cy="0"/>
+          <a:chOff x="0" y="0"/>
+          <a:chExt cx="0" cy="0"/>
+        </a:xfrm>
+      </p:grpSpPr>
+      <p:sp>
+        <p:nvSpPr>
+          <p:cNvPr id="2" name="Slide Image Placeholder 1"/>
+          <p:cNvSpPr>
+            <a:spLocks noGrp="1" noRot="1" noChangeAspect="1"/>
+          </p:cNvSpPr>
+          <p:nvPr>
+            <p:ph type="sldImg"/>
+          </p:nvPr>
+        </p:nvSpPr>
+        <p:spPr/>
+      </p:sp>
+      <p:sp>
+        <p:nvSpPr>
+          <p:cNvPr id="3" name="Notes Placeholder 2"/>
+          <p:cNvSpPr>
+            <a:spLocks noGrp="1"/>
+          </p:cNvSpPr>
+          <p:nvPr>
+            <p:ph type="body" idx="1"/>
+          </p:nvPr>
+        </p:nvSpPr>
+        <p:spPr/>
+        <p:txBody>
+          <a:bodyPr/>
+          <a:lstStyle/>
+          <a:p>
+            <a:r>
+              <a:rPr lang="en-US" dirty="0"/>
+              <a:t/>
+            </a:r>
+            <a:endParaRPr lang="en-US" dirty="0"/>
+          </a:p>
+        </p:txBody>
+      </p:sp>
+      <p:sp>
+        <p:nvSpPr>
+          <p:cNvPr id="4" name="Slide Number Placeholder 3"/>
+          <p:cNvSpPr>
+            <a:spLocks noGrp="1"/>
+          </p:cNvSpPr>
+          <p:nvPr>
+            <p:ph type="sldNum" sz="quarter" idx="10"/>
+          </p:nvPr>
+        </p:nvSpPr>
+        <p:spPr/>
+        <p:txBody>
+          <a:bodyPr/>
+          <a:lstStyle/>
+          <a:p>
+            <a:fld id="{F7021451-1387-4CA6-816F-3879F97B5CBC}" type="slidenum">
+              <a:rPr lang="en-US"/>
+              <a:t>14</a:t>
             </a:fld>
             <a:endParaRPr lang="en-US"/>
           </a:p>
@@ -2706,38 +2796,205 @@
                 <a:ea typeface="Cambria" pitchFamily="34" charset="-122"/>
                 <a:cs typeface="Cambria" pitchFamily="34" charset="-120"/>
               </a:rPr>
-              <a:t>New: checking every cell beats a pandas read</a:t>
+              <a:t>Real data, real scripts: no unsound run</a:t>
             </a:r>
             <a:endParaRPr lang="en-US" sz="2800" dirty="0"/>
           </a:p>
         </p:txBody>
       </p:sp>
-      <p:graphicFrame>
-        <p:nvGraphicFramePr>
-          <p:cNvPr id="4" name="Chart 0" descr=""/>
-          <p:cNvGraphicFramePr/>
-          <p:nvPr/>
-        </p:nvGraphicFramePr>
-        <p:xfrm>
-          <a:off x="457200" y="1051560"/>
-          <a:ext cx="5120640" cy="3566160"/>
-        </p:xfrm>
-        <a:graphic xmlns:a="http://schemas.openxmlformats.org/drawingml/2006/main">
-          <a:graphicData uri="http://schemas.openxmlformats.org/drawingml/2006/chart">
-            <c:chart xmlns:c="http://schemas.openxmlformats.org/drawingml/2006/chart" r:id="rId1"/>
-          </a:graphicData>
-        </a:graphic>
-      </p:graphicFrame>
-      <p:sp>
-        <p:nvSpPr>
-          <p:cNvPr id="5" name="Text 2"/>
-          <p:cNvSpPr txBox="1"/>
-          <p:nvPr/>
-        </p:nvSpPr>
-        <p:spPr>
-          <a:xfrm>
-            <a:off x="5943600" y="1097280"/>
-            <a:ext cx="2743200" cy="365760"/>
+      <p:sp>
+        <p:nvSpPr>
+          <p:cNvPr id="4" name="Shape 2"/>
+          <p:cNvSpPr/>
+          <p:nvPr/>
+        </p:nvSpPr>
+        <p:spPr>
+          <a:xfrm>
+            <a:off x="457200" y="1097280"/>
+            <a:ext cx="4023360" cy="3291840"/>
+          </a:xfrm>
+          <a:prstGeom prst="roundRect">
+            <a:avLst>
+              <a:gd name="adj" fmla="val 2222"/>
+            </a:avLst>
+          </a:prstGeom>
+          <a:solidFill>
+            <a:srgbClr val="EEF1F4"/>
+          </a:solidFill>
+          <a:ln w="12700">
+            <a:solidFill>
+              <a:srgbClr val="EEF1F4"/>
+            </a:solidFill>
+            <a:prstDash val="solid"/>
+          </a:ln>
+        </p:spPr>
+      </p:sp>
+      <p:sp>
+        <p:nvSpPr>
+          <p:cNvPr id="5" name="Text 3"/>
+          <p:cNvSpPr txBox="1"/>
+          <p:nvPr/>
+        </p:nvSpPr>
+        <p:spPr>
+          <a:xfrm>
+            <a:off x="685800" y="1234440"/>
+            <a:ext cx="3657600" cy="365760"/>
+          </a:xfrm>
+          <a:prstGeom prst="rect">
+            <a:avLst/>
+          </a:prstGeom>
+          <a:noFill/>
+          <a:ln/>
+        </p:spPr>
+        <p:txBody>
+          <a:bodyPr wrap="square" lIns="0" tIns="0" rIns="0" bIns="0" rtlCol="0" anchor="ctr"/>
+          <a:lstStyle/>
+          <a:p>
+            <a:pPr indent="0" marL="0">
+              <a:buNone/>
+            </a:pPr>
+            <a:r>
+              <a:rPr lang="en-US" sz="1600" b="1" dirty="0">
+                <a:solidFill>
+                  <a:srgbClr val="23867A"/>
+                </a:solidFill>
+                <a:latin typeface="Calibri" pitchFamily="34" charset="0"/>
+                <a:ea typeface="Calibri" pitchFamily="34" charset="-122"/>
+                <a:cs typeface="Calibri" pitchFamily="34" charset="-120"/>
+              </a:rPr>
+              <a:t>Real monthly data</a:t>
+            </a:r>
+            <a:endParaRPr lang="en-US" sz="1600" dirty="0"/>
+          </a:p>
+        </p:txBody>
+      </p:sp>
+      <p:sp>
+        <p:nvSpPr>
+          <p:cNvPr id="6" name="Text 4"/>
+          <p:cNvSpPr txBox="1"/>
+          <p:nvPr/>
+        </p:nvSpPr>
+        <p:spPr>
+          <a:xfrm>
+            <a:off x="685800" y="1600200"/>
+            <a:ext cx="3657600" cy="548640"/>
+          </a:xfrm>
+          <a:prstGeom prst="rect">
+            <a:avLst/>
+          </a:prstGeom>
+          <a:noFill/>
+          <a:ln/>
+        </p:spPr>
+        <p:txBody>
+          <a:bodyPr wrap="square" lIns="0" tIns="0" rIns="0" bIns="0" rtlCol="0" anchor="ctr"/>
+          <a:lstStyle/>
+          <a:p>
+            <a:pPr indent="0" marL="0">
+              <a:buNone/>
+            </a:pPr>
+            <a:r>
+              <a:rPr lang="en-US" sz="1200" dirty="0">
+                <a:solidFill>
+                  <a:srgbClr val="5B6573"/>
+                </a:solidFill>
+                <a:latin typeface="Calibri" pitchFamily="34" charset="0"/>
+                <a:ea typeface="Calibri" pitchFamily="34" charset="-122"/>
+                <a:cs typeface="Calibri" pitchFamily="34" charset="-120"/>
+              </a:rPr>
+              <a:t>Traffic sensors and bike rentals (UCI), New York green taxi Parquet files 2022-2024</a:t>
+            </a:r>
+            <a:endParaRPr lang="en-US" sz="1200" dirty="0"/>
+          </a:p>
+        </p:txBody>
+      </p:sp>
+      <p:sp>
+        <p:nvSpPr>
+          <p:cNvPr id="7" name="Text 5"/>
+          <p:cNvSpPr txBox="1"/>
+          <p:nvPr/>
+        </p:nvSpPr>
+        <p:spPr>
+          <a:xfrm>
+            <a:off x="685800" y="2194560"/>
+            <a:ext cx="3657600" cy="685800"/>
+          </a:xfrm>
+          <a:prstGeom prst="rect">
+            <a:avLst/>
+          </a:prstGeom>
+          <a:noFill/>
+          <a:ln/>
+        </p:spPr>
+        <p:txBody>
+          <a:bodyPr wrap="square" lIns="0" tIns="0" rIns="0" bIns="0" rtlCol="0" anchor="ctr"/>
+          <a:lstStyle/>
+          <a:p>
+            <a:pPr indent="0" marL="0">
+              <a:buNone/>
+            </a:pPr>
+            <a:r>
+              <a:rPr lang="en-US" sz="4000" b="1" dirty="0">
+                <a:solidFill>
+                  <a:srgbClr val="1B2430"/>
+                </a:solidFill>
+                <a:latin typeface="Cambria" pitchFamily="34" charset="0"/>
+                <a:ea typeface="Cambria" pitchFamily="34" charset="-122"/>
+                <a:cs typeface="Cambria" pitchFamily="34" charset="-120"/>
+              </a:rPr>
+              <a:t>86%</a:t>
+            </a:r>
+            <a:endParaRPr lang="en-US" sz="4000" dirty="0"/>
+          </a:p>
+        </p:txBody>
+      </p:sp>
+      <p:sp>
+        <p:nvSpPr>
+          <p:cNvPr id="8" name="Text 6"/>
+          <p:cNvSpPr txBox="1"/>
+          <p:nvPr/>
+        </p:nvSpPr>
+        <p:spPr>
+          <a:xfrm>
+            <a:off x="685800" y="2880360"/>
+            <a:ext cx="3657600" cy="502920"/>
+          </a:xfrm>
+          <a:prstGeom prst="rect">
+            <a:avLst/>
+          </a:prstGeom>
+          <a:noFill/>
+          <a:ln/>
+        </p:spPr>
+        <p:txBody>
+          <a:bodyPr wrap="square" lIns="0" tIns="0" rIns="0" bIns="0" rtlCol="0" anchor="ctr"/>
+          <a:lstStyle/>
+          <a:p>
+            <a:pPr indent="0" marL="0">
+              <a:buNone/>
+            </a:pPr>
+            <a:r>
+              <a:rPr lang="en-US" sz="1300" dirty="0">
+                <a:solidFill>
+                  <a:srgbClr val="5B6573"/>
+                </a:solidFill>
+                <a:latin typeface="Calibri" pitchFamily="34" charset="0"/>
+                <a:ea typeface="Calibri" pitchFamily="34" charset="-122"/>
+                <a:cs typeface="Calibri" pitchFamily="34" charset="-120"/>
+              </a:rPr>
+              <a:t>of 238 new months admitted; the month's own facts: 1%</a:t>
+            </a:r>
+            <a:endParaRPr lang="en-US" sz="1300" dirty="0"/>
+          </a:p>
+        </p:txBody>
+      </p:sp>
+      <p:sp>
+        <p:nvSpPr>
+          <p:cNvPr id="9" name="Text 7"/>
+          <p:cNvSpPr txBox="1"/>
+          <p:nvPr/>
+        </p:nvSpPr>
+        <p:spPr>
+          <a:xfrm>
+            <a:off x="685800" y="3566160"/>
+            <a:ext cx="3657600" cy="548640"/>
           </a:xfrm>
           <a:prstGeom prst="rect">
             <a:avLst/>
@@ -2761,7 +3018,7 @@
                 <a:ea typeface="Calibri" pitchFamily="34" charset="-122"/>
                 <a:cs typeface="Calibri" pitchFamily="34" charset="-120"/>
               </a:rPr>
-              <a:t>One million CSV rows x 10 columns</a:t>
+              <a:t>0 admitted runs differ from a fresh compilation</a:t>
             </a:r>
             <a:endParaRPr lang="en-US" sz="1300" dirty="0"/>
           </a:p>
@@ -2769,105 +3026,221 @@
       </p:sp>
       <p:sp>
         <p:nvSpPr>
-          <p:cNvPr id="6" name="Text 3"/>
-          <p:cNvSpPr txBox="1"/>
-          <p:nvPr/>
-        </p:nvSpPr>
-        <p:spPr>
-          <a:xfrm>
-            <a:off x="5943600" y="1554480"/>
-            <a:ext cx="2743200" cy="3017520"/>
-          </a:xfrm>
-          <a:prstGeom prst="rect">
-            <a:avLst/>
-          </a:prstGeom>
-          <a:noFill/>
-          <a:ln/>
-        </p:spPr>
-        <p:txBody>
-          <a:bodyPr wrap="square" lIns="0" tIns="0" rIns="0" bIns="0" rtlCol="0" anchor="t"/>
-          <a:lstStyle/>
-          <a:p>
-            <a:pPr marL="342900" indent="-342900">
-              <a:spcAft>
-                <a:spcPts val="600"/>
-              </a:spcAft>
-              <a:buSzPct val="100000"/>
-              <a:buChar char="•"/>
+          <p:cNvPr id="10" name="Shape 8"/>
+          <p:cNvSpPr/>
+          <p:nvPr/>
+        </p:nvSpPr>
+        <p:spPr>
+          <a:xfrm>
+            <a:off x="4663440" y="1097280"/>
+            <a:ext cx="4023360" cy="3291840"/>
+          </a:xfrm>
+          <a:prstGeom prst="roundRect">
+            <a:avLst>
+              <a:gd name="adj" fmla="val 2222"/>
+            </a:avLst>
+          </a:prstGeom>
+          <a:solidFill>
+            <a:srgbClr val="EEF1F4"/>
+          </a:solidFill>
+          <a:ln w="12700">
+            <a:solidFill>
+              <a:srgbClr val="EEF1F4"/>
+            </a:solidFill>
+            <a:prstDash val="solid"/>
+          </a:ln>
+        </p:spPr>
+      </p:sp>
+      <p:sp>
+        <p:nvSpPr>
+          <p:cNvPr id="11" name="Text 9"/>
+          <p:cNvSpPr txBox="1"/>
+          <p:nvPr/>
+        </p:nvSpPr>
+        <p:spPr>
+          <a:xfrm>
+            <a:off x="4892040" y="1234440"/>
+            <a:ext cx="3657600" cy="365760"/>
+          </a:xfrm>
+          <a:prstGeom prst="rect">
+            <a:avLst/>
+          </a:prstGeom>
+          <a:noFill/>
+          <a:ln/>
+        </p:spPr>
+        <p:txBody>
+          <a:bodyPr wrap="square" lIns="0" tIns="0" rIns="0" bIns="0" rtlCol="0" anchor="ctr"/>
+          <a:lstStyle/>
+          <a:p>
+            <a:pPr indent="0" marL="0">
+              <a:buNone/>
+            </a:pPr>
+            <a:r>
+              <a:rPr lang="en-US" sz="1600" b="1" dirty="0">
+                <a:solidFill>
+                  <a:srgbClr val="23867A"/>
+                </a:solidFill>
+                <a:latin typeface="Calibri" pitchFamily="34" charset="0"/>
+                <a:ea typeface="Calibri" pitchFamily="34" charset="-122"/>
+                <a:cs typeface="Calibri" pitchFamily="34" charset="-120"/>
+              </a:rPr>
+              <a:t>Real pandas scripts</a:t>
+            </a:r>
+            <a:endParaRPr lang="en-US" sz="1600" dirty="0"/>
+          </a:p>
+        </p:txBody>
+      </p:sp>
+      <p:sp>
+        <p:nvSpPr>
+          <p:cNvPr id="12" name="Text 10"/>
+          <p:cNvSpPr txBox="1"/>
+          <p:nvPr/>
+        </p:nvSpPr>
+        <p:spPr>
+          <a:xfrm>
+            <a:off x="4892040" y="1600200"/>
+            <a:ext cx="3657600" cy="548640"/>
+          </a:xfrm>
+          <a:prstGeom prst="rect">
+            <a:avLst/>
+          </a:prstGeom>
+          <a:noFill/>
+          <a:ln/>
+        </p:spPr>
+        <p:txBody>
+          <a:bodyPr wrap="square" lIns="0" tIns="0" rIns="0" bIns="0" rtlCol="0" anchor="ctr"/>
+          <a:lstStyle/>
+          <a:p>
+            <a:pPr indent="0" marL="0">
+              <a:buNone/>
+            </a:pPr>
+            <a:r>
+              <a:rPr lang="en-US" sz="1200" dirty="0">
+                <a:solidFill>
+                  <a:srgbClr val="5B6573"/>
+                </a:solidFill>
+                <a:latin typeface="Calibri" pitchFamily="34" charset="0"/>
+                <a:ea typeface="Calibri" pitchFamily="34" charset="-122"/>
+                <a:cs typeface="Calibri" pitchFamily="34" charset="-120"/>
+              </a:rPr>
+              <a:t>372 Titanic scripts from GitHub; 124 held-out scripts lifted into PrepLang by a new front end</a:t>
+            </a:r>
+            <a:endParaRPr lang="en-US" sz="1200" dirty="0"/>
+          </a:p>
+        </p:txBody>
+      </p:sp>
+      <p:sp>
+        <p:nvSpPr>
+          <p:cNvPr id="13" name="Text 11"/>
+          <p:cNvSpPr txBox="1"/>
+          <p:nvPr/>
+        </p:nvSpPr>
+        <p:spPr>
+          <a:xfrm>
+            <a:off x="4892040" y="2194560"/>
+            <a:ext cx="3657600" cy="685800"/>
+          </a:xfrm>
+          <a:prstGeom prst="rect">
+            <a:avLst/>
+          </a:prstGeom>
+          <a:noFill/>
+          <a:ln/>
+        </p:spPr>
+        <p:txBody>
+          <a:bodyPr wrap="square" lIns="0" tIns="0" rIns="0" bIns="0" rtlCol="0" anchor="ctr"/>
+          <a:lstStyle/>
+          <a:p>
+            <a:pPr indent="0" marL="0">
+              <a:buNone/>
+            </a:pPr>
+            <a:r>
+              <a:rPr lang="en-US" sz="4000" b="1" dirty="0">
+                <a:solidFill>
+                  <a:srgbClr val="1B2430"/>
+                </a:solidFill>
+                <a:latin typeface="Cambria" pitchFamily="34" charset="0"/>
+                <a:ea typeface="Cambria" pitchFamily="34" charset="-122"/>
+                <a:cs typeface="Cambria" pitchFamily="34" charset="-120"/>
+              </a:rPr>
+              <a:t>1347</a:t>
+            </a:r>
+            <a:endParaRPr lang="en-US" sz="4000" dirty="0"/>
+          </a:p>
+        </p:txBody>
+      </p:sp>
+      <p:sp>
+        <p:nvSpPr>
+          <p:cNvPr id="14" name="Text 12"/>
+          <p:cNvSpPr txBox="1"/>
+          <p:nvPr/>
+        </p:nvSpPr>
+        <p:spPr>
+          <a:xfrm>
+            <a:off x="4892040" y="2880360"/>
+            <a:ext cx="3657600" cy="502920"/>
+          </a:xfrm>
+          <a:prstGeom prst="rect">
+            <a:avLst/>
+          </a:prstGeom>
+          <a:noFill/>
+          <a:ln/>
+        </p:spPr>
+        <p:txBody>
+          <a:bodyPr wrap="square" lIns="0" tIns="0" rIns="0" bIns="0" rtlCol="0" anchor="ctr"/>
+          <a:lstStyle/>
+          <a:p>
+            <a:pPr indent="0" marL="0">
+              <a:buNone/>
             </a:pPr>
             <a:r>
               <a:rPr lang="en-US" sz="1300" dirty="0">
                 <a:solidFill>
+                  <a:srgbClr val="5B6573"/>
+                </a:solidFill>
+                <a:latin typeface="Calibri" pitchFamily="34" charset="0"/>
+                <a:ea typeface="Calibri" pitchFamily="34" charset="-122"/>
+                <a:cs typeface="Calibri" pitchFamily="34" charset="-120"/>
+              </a:rPr>
+              <a:t>of 1364 runs on new batches give exactly the script's own result</a:t>
+            </a:r>
+            <a:endParaRPr lang="en-US" sz="1300" dirty="0"/>
+          </a:p>
+        </p:txBody>
+      </p:sp>
+      <p:sp>
+        <p:nvSpPr>
+          <p:cNvPr id="15" name="Text 13"/>
+          <p:cNvSpPr txBox="1"/>
+          <p:nvPr/>
+        </p:nvSpPr>
+        <p:spPr>
+          <a:xfrm>
+            <a:off x="4892040" y="3566160"/>
+            <a:ext cx="3657600" cy="548640"/>
+          </a:xfrm>
+          <a:prstGeom prst="rect">
+            <a:avLst/>
+          </a:prstGeom>
+          <a:noFill/>
+          <a:ln/>
+        </p:spPr>
+        <p:txBody>
+          <a:bodyPr wrap="square" lIns="0" tIns="0" rIns="0" bIns="0" rtlCol="0" anchor="ctr"/>
+          <a:lstStyle/>
+          <a:p>
+            <a:pPr indent="0" marL="0">
+              <a:buNone/>
+            </a:pPr>
+            <a:r>
+              <a:rPr lang="en-US" sz="1300" b="1" dirty="0">
+                <a:solidFill>
                   <a:srgbClr val="1B2430"/>
                 </a:solidFill>
                 <a:latin typeface="Calibri" pitchFamily="34" charset="0"/>
                 <a:ea typeface="Calibri" pitchFamily="34" charset="-122"/>
                 <a:cs typeface="Calibri" pitchFamily="34" charset="-120"/>
               </a:rPr>
-              <a:t>One read, one piece per core, cut at line breaks</a:t>
-            </a:r>
-            <a:endParaRPr lang="en-US" sz="1300" dirty="0"/>
-          </a:p>
-          <a:p>
-            <a:pPr marL="342900" indent="-342900">
-              <a:spcAft>
-                <a:spcPts val="600"/>
-              </a:spcAft>
-              <a:buSzPct val="100000"/>
-              <a:buChar char="•"/>
-            </a:pPr>
-            <a:r>
-              <a:rPr lang="en-US" sz="1300" dirty="0">
-                <a:solidFill>
-                  <a:srgbClr val="1B2430"/>
-                </a:solidFill>
-                <a:latin typeface="Calibri" pitchFamily="34" charset="0"/>
-                <a:ea typeface="Calibri" pitchFamily="34" charset="-122"/>
-                <a:cs typeface="Calibri" pitchFamily="34" charset="-120"/>
-              </a:rPr>
-              <a:t>Cells viewed in place (string_view), no copies</a:t>
-            </a:r>
-            <a:endParaRPr lang="en-US" sz="1300" dirty="0"/>
-          </a:p>
-          <a:p>
-            <a:pPr marL="342900" indent="-342900">
-              <a:spcAft>
-                <a:spcPts val="600"/>
-              </a:spcAft>
-              <a:buSzPct val="100000"/>
-              <a:buChar char="•"/>
-            </a:pPr>
-            <a:r>
-              <a:rPr lang="en-US" sz="1300" dirty="0">
-                <a:solidFill>
-                  <a:srgbClr val="1B2430"/>
-                </a:solidFill>
-                <a:latin typeface="Calibri" pitchFamily="34" charset="0"/>
-                <a:ea typeface="Calibri" pitchFamily="34" charset="-122"/>
-                <a:cs typeface="Calibri" pitchFamily="34" charset="-120"/>
-              </a:rPr>
-              <a:t>Numbers parsed exactly in one pass (Clinger's fast path)</a:t>
-            </a:r>
-            <a:endParaRPr lang="en-US" sz="1300" dirty="0"/>
-          </a:p>
-          <a:p>
-            <a:pPr marL="342900" indent="-342900">
-              <a:spcAft>
-                <a:spcPts val="600"/>
-              </a:spcAft>
-              <a:buSzPct val="100000"/>
-              <a:buChar char="•"/>
-            </a:pPr>
-            <a:r>
-              <a:rPr lang="en-US" sz="1300" dirty="0">
-                <a:solidFill>
-                  <a:srgbClr val="1B2430"/>
-                </a:solidFill>
-                <a:latin typeface="Calibri" pitchFamily="34" charset="0"/>
-                <a:ea typeface="Calibri" pitchFamily="34" charset="-122"/>
-                <a:cs typeface="Calibri" pitchFamily="34" charset="-120"/>
-              </a:rPr>
-              <a:t>CRC-32 on its own thread; merge in file order gives the same facts and line numbers</a:t>
+              <a:t>0 admitted runs differ from the script</a:t>
             </a:r>
             <a:endParaRPr lang="en-US" sz="1300" dirty="0"/>
           </a:p>
@@ -2977,427 +3350,168 @@
                 <a:ea typeface="Cambria" pitchFamily="34" charset="-122"/>
                 <a:cs typeface="Cambria" pitchFamily="34" charset="-120"/>
               </a:rPr>
-              <a:t>Testing and evaluation</a:t>
+              <a:t>New: checking every cell beats a pandas read</a:t>
             </a:r>
             <a:endParaRPr lang="en-US" sz="2800" dirty="0"/>
           </a:p>
         </p:txBody>
       </p:sp>
-      <p:sp>
-        <p:nvSpPr>
-          <p:cNvPr id="4" name="Shape 2"/>
-          <p:cNvSpPr/>
-          <p:nvPr/>
-        </p:nvSpPr>
-        <p:spPr>
-          <a:xfrm>
-            <a:off x="457200" y="1097280"/>
-            <a:ext cx="4023360" cy="1463040"/>
-          </a:xfrm>
-          <a:prstGeom prst="roundRect">
-            <a:avLst>
-              <a:gd name="adj" fmla="val 5000"/>
-            </a:avLst>
-          </a:prstGeom>
-          <a:solidFill>
-            <a:srgbClr val="EEF1F4"/>
-          </a:solidFill>
-          <a:ln w="12700">
-            <a:solidFill>
-              <a:srgbClr val="EEF1F4"/>
-            </a:solidFill>
-            <a:prstDash val="solid"/>
-          </a:ln>
-        </p:spPr>
-      </p:sp>
-      <p:sp>
-        <p:nvSpPr>
-          <p:cNvPr id="5" name="Text 3"/>
-          <p:cNvSpPr txBox="1"/>
-          <p:nvPr/>
-        </p:nvSpPr>
-        <p:spPr>
-          <a:xfrm>
-            <a:off x="685800" y="1188720"/>
-            <a:ext cx="3566160" cy="685800"/>
-          </a:xfrm>
-          <a:prstGeom prst="rect">
-            <a:avLst/>
-          </a:prstGeom>
-          <a:noFill/>
-          <a:ln/>
-        </p:spPr>
-        <p:txBody>
-          <a:bodyPr wrap="square" lIns="0" tIns="0" rIns="0" bIns="0" rtlCol="0" anchor="ctr"/>
-          <a:lstStyle/>
-          <a:p>
-            <a:pPr indent="0" marL="0">
-              <a:buNone/>
-            </a:pPr>
-            <a:r>
-              <a:rPr lang="en-US" sz="4000" b="1" dirty="0">
+      <p:graphicFrame>
+        <p:nvGraphicFramePr>
+          <p:cNvPr id="4" name="Chart 0" descr=""/>
+          <p:cNvGraphicFramePr/>
+          <p:nvPr/>
+        </p:nvGraphicFramePr>
+        <p:xfrm>
+          <a:off x="457200" y="1051560"/>
+          <a:ext cx="5120640" cy="3566160"/>
+        </p:xfrm>
+        <a:graphic xmlns:a="http://schemas.openxmlformats.org/drawingml/2006/main">
+          <a:graphicData uri="http://schemas.openxmlformats.org/drawingml/2006/chart">
+            <c:chart xmlns:c="http://schemas.openxmlformats.org/drawingml/2006/chart" r:id="rId1"/>
+          </a:graphicData>
+        </a:graphic>
+      </p:graphicFrame>
+      <p:sp>
+        <p:nvSpPr>
+          <p:cNvPr id="5" name="Text 2"/>
+          <p:cNvSpPr txBox="1"/>
+          <p:nvPr/>
+        </p:nvSpPr>
+        <p:spPr>
+          <a:xfrm>
+            <a:off x="5943600" y="1097280"/>
+            <a:ext cx="2743200" cy="365760"/>
+          </a:xfrm>
+          <a:prstGeom prst="rect">
+            <a:avLst/>
+          </a:prstGeom>
+          <a:noFill/>
+          <a:ln/>
+        </p:spPr>
+        <p:txBody>
+          <a:bodyPr wrap="square" lIns="0" tIns="0" rIns="0" bIns="0" rtlCol="0" anchor="ctr"/>
+          <a:lstStyle/>
+          <a:p>
+            <a:pPr indent="0" marL="0">
+              <a:buNone/>
+            </a:pPr>
+            <a:r>
+              <a:rPr lang="en-US" sz="1300" b="1" dirty="0">
                 <a:solidFill>
                   <a:srgbClr val="1B2430"/>
                 </a:solidFill>
-                <a:latin typeface="Cambria" pitchFamily="34" charset="0"/>
-                <a:ea typeface="Cambria" pitchFamily="34" charset="-122"/>
-                <a:cs typeface="Cambria" pitchFamily="34" charset="-120"/>
-              </a:rPr>
-              <a:t>181</a:t>
-            </a:r>
-            <a:endParaRPr lang="en-US" sz="4000" dirty="0"/>
-          </a:p>
-        </p:txBody>
-      </p:sp>
-      <p:sp>
-        <p:nvSpPr>
-          <p:cNvPr id="6" name="Text 4"/>
-          <p:cNvSpPr txBox="1"/>
-          <p:nvPr/>
-        </p:nvSpPr>
-        <p:spPr>
-          <a:xfrm>
-            <a:off x="685800" y="1874520"/>
-            <a:ext cx="3566160" cy="502920"/>
-          </a:xfrm>
-          <a:prstGeom prst="rect">
-            <a:avLst/>
-          </a:prstGeom>
-          <a:noFill/>
-          <a:ln/>
-        </p:spPr>
-        <p:txBody>
-          <a:bodyPr wrap="square" lIns="0" tIns="0" rIns="0" bIns="0" rtlCol="0" anchor="ctr"/>
-          <a:lstStyle/>
-          <a:p>
-            <a:pPr indent="0" marL="0">
-              <a:buNone/>
+                <a:latin typeface="Calibri" pitchFamily="34" charset="0"/>
+                <a:ea typeface="Calibri" pitchFamily="34" charset="-122"/>
+                <a:cs typeface="Calibri" pitchFamily="34" charset="-120"/>
+              </a:rPr>
+              <a:t>One million CSV rows x 10 columns</a:t>
+            </a:r>
+            <a:endParaRPr lang="en-US" sz="1300" dirty="0"/>
+          </a:p>
+        </p:txBody>
+      </p:sp>
+      <p:sp>
+        <p:nvSpPr>
+          <p:cNvPr id="6" name="Text 3"/>
+          <p:cNvSpPr txBox="1"/>
+          <p:nvPr/>
+        </p:nvSpPr>
+        <p:spPr>
+          <a:xfrm>
+            <a:off x="5943600" y="1554480"/>
+            <a:ext cx="2743200" cy="3017520"/>
+          </a:xfrm>
+          <a:prstGeom prst="rect">
+            <a:avLst/>
+          </a:prstGeom>
+          <a:noFill/>
+          <a:ln/>
+        </p:spPr>
+        <p:txBody>
+          <a:bodyPr wrap="square" lIns="0" tIns="0" rIns="0" bIns="0" rtlCol="0" anchor="t"/>
+          <a:lstStyle/>
+          <a:p>
+            <a:pPr marL="342900" indent="-342900">
+              <a:spcAft>
+                <a:spcPts val="600"/>
+              </a:spcAft>
+              <a:buSzPct val="100000"/>
+              <a:buChar char="•"/>
             </a:pPr>
             <a:r>
               <a:rPr lang="en-US" sz="1300" dirty="0">
                 <a:solidFill>
-                  <a:srgbClr val="5B6573"/>
-                </a:solidFill>
-                <a:latin typeface="Calibri" pitchFamily="34" charset="0"/>
-                <a:ea typeface="Calibri" pitchFamily="34" charset="-122"/>
-                <a:cs typeface="Calibri" pitchFamily="34" charset="-120"/>
-              </a:rPr>
-              <a:t>unit tests in 9 programs, all passing</a:t>
+                  <a:srgbClr val="1B2430"/>
+                </a:solidFill>
+                <a:latin typeface="Calibri" pitchFamily="34" charset="0"/>
+                <a:ea typeface="Calibri" pitchFamily="34" charset="-122"/>
+                <a:cs typeface="Calibri" pitchFamily="34" charset="-120"/>
+              </a:rPr>
+              <a:t>One read, one piece per core, cut at line breaks</a:t>
             </a:r>
             <a:endParaRPr lang="en-US" sz="1300" dirty="0"/>
           </a:p>
-        </p:txBody>
-      </p:sp>
-      <p:sp>
-        <p:nvSpPr>
-          <p:cNvPr id="7" name="Shape 5"/>
-          <p:cNvSpPr/>
-          <p:nvPr/>
-        </p:nvSpPr>
-        <p:spPr>
-          <a:xfrm>
-            <a:off x="4663440" y="1097280"/>
-            <a:ext cx="4023360" cy="1463040"/>
-          </a:xfrm>
-          <a:prstGeom prst="roundRect">
-            <a:avLst>
-              <a:gd name="adj" fmla="val 5000"/>
-            </a:avLst>
-          </a:prstGeom>
-          <a:solidFill>
-            <a:srgbClr val="EEF1F4"/>
-          </a:solidFill>
-          <a:ln w="12700">
-            <a:solidFill>
-              <a:srgbClr val="EEF1F4"/>
-            </a:solidFill>
-            <a:prstDash val="solid"/>
-          </a:ln>
-        </p:spPr>
-      </p:sp>
-      <p:sp>
-        <p:nvSpPr>
-          <p:cNvPr id="8" name="Text 6"/>
-          <p:cNvSpPr txBox="1"/>
-          <p:nvPr/>
-        </p:nvSpPr>
-        <p:spPr>
-          <a:xfrm>
-            <a:off x="4892040" y="1188720"/>
-            <a:ext cx="3566160" cy="685800"/>
-          </a:xfrm>
-          <a:prstGeom prst="rect">
-            <a:avLst/>
-          </a:prstGeom>
-          <a:noFill/>
-          <a:ln/>
-        </p:spPr>
-        <p:txBody>
-          <a:bodyPr wrap="square" lIns="0" tIns="0" rIns="0" bIns="0" rtlCol="0" anchor="ctr"/>
-          <a:lstStyle/>
-          <a:p>
-            <a:pPr indent="0" marL="0">
-              <a:buNone/>
-            </a:pPr>
-            <a:r>
-              <a:rPr lang="en-US" sz="4000" b="1" dirty="0">
-                <a:solidFill>
-                  <a:srgbClr val="23867A"/>
-                </a:solidFill>
-                <a:latin typeface="Cambria" pitchFamily="34" charset="0"/>
-                <a:ea typeface="Cambria" pitchFamily="34" charset="-122"/>
-                <a:cs typeface="Cambria" pitchFamily="34" charset="-120"/>
-              </a:rPr>
-              <a:t>17</a:t>
-            </a:r>
-            <a:endParaRPr lang="en-US" sz="4000" dirty="0"/>
-          </a:p>
-        </p:txBody>
-      </p:sp>
-      <p:sp>
-        <p:nvSpPr>
-          <p:cNvPr id="9" name="Text 7"/>
-          <p:cNvSpPr txBox="1"/>
-          <p:nvPr/>
-        </p:nvSpPr>
-        <p:spPr>
-          <a:xfrm>
-            <a:off x="4892040" y="1874520"/>
-            <a:ext cx="3566160" cy="502920"/>
-          </a:xfrm>
-          <a:prstGeom prst="rect">
-            <a:avLst/>
-          </a:prstGeom>
-          <a:noFill/>
-          <a:ln/>
-        </p:spPr>
-        <p:txBody>
-          <a:bodyPr wrap="square" lIns="0" tIns="0" rIns="0" bIns="0" rtlCol="0" anchor="ctr"/>
-          <a:lstStyle/>
-          <a:p>
-            <a:pPr indent="0" marL="0">
-              <a:buNone/>
+          <a:p>
+            <a:pPr marL="342900" indent="-342900">
+              <a:spcAft>
+                <a:spcPts val="600"/>
+              </a:spcAft>
+              <a:buSzPct val="100000"/>
+              <a:buChar char="•"/>
             </a:pPr>
             <a:r>
               <a:rPr lang="en-US" sz="1300" dirty="0">
                 <a:solidFill>
-                  <a:srgbClr val="5B6573"/>
-                </a:solidFill>
-                <a:latin typeface="Calibri" pitchFamily="34" charset="0"/>
-                <a:ea typeface="Calibri" pitchFamily="34" charset="-122"/>
-                <a:cs typeface="Calibri" pitchFamily="34" charset="-120"/>
-              </a:rPr>
-              <a:t>recorded test cases: valid, invalid, boundary, run time</a:t>
+                  <a:srgbClr val="1B2430"/>
+                </a:solidFill>
+                <a:latin typeface="Calibri" pitchFamily="34" charset="0"/>
+                <a:ea typeface="Calibri" pitchFamily="34" charset="-122"/>
+                <a:cs typeface="Calibri" pitchFamily="34" charset="-120"/>
+              </a:rPr>
+              <a:t>Cells viewed in place (string_view), no copies</a:t>
             </a:r>
             <a:endParaRPr lang="en-US" sz="1300" dirty="0"/>
           </a:p>
-        </p:txBody>
-      </p:sp>
-      <p:sp>
-        <p:nvSpPr>
-          <p:cNvPr id="10" name="Shape 8"/>
-          <p:cNvSpPr/>
-          <p:nvPr/>
-        </p:nvSpPr>
-        <p:spPr>
-          <a:xfrm>
-            <a:off x="457200" y="2788920"/>
-            <a:ext cx="4023360" cy="1463040"/>
-          </a:xfrm>
-          <a:prstGeom prst="roundRect">
-            <a:avLst>
-              <a:gd name="adj" fmla="val 5000"/>
-            </a:avLst>
-          </a:prstGeom>
-          <a:solidFill>
-            <a:srgbClr val="EEF1F4"/>
-          </a:solidFill>
-          <a:ln w="12700">
-            <a:solidFill>
-              <a:srgbClr val="EEF1F4"/>
-            </a:solidFill>
-            <a:prstDash val="solid"/>
-          </a:ln>
-        </p:spPr>
-      </p:sp>
-      <p:sp>
-        <p:nvSpPr>
-          <p:cNvPr id="11" name="Text 9"/>
-          <p:cNvSpPr txBox="1"/>
-          <p:nvPr/>
-        </p:nvSpPr>
-        <p:spPr>
-          <a:xfrm>
-            <a:off x="685800" y="2880360"/>
-            <a:ext cx="3566160" cy="685800"/>
-          </a:xfrm>
-          <a:prstGeom prst="rect">
-            <a:avLst/>
-          </a:prstGeom>
-          <a:noFill/>
-          <a:ln/>
-        </p:spPr>
-        <p:txBody>
-          <a:bodyPr wrap="square" lIns="0" tIns="0" rIns="0" bIns="0" rtlCol="0" anchor="ctr"/>
-          <a:lstStyle/>
-          <a:p>
-            <a:pPr indent="0" marL="0">
-              <a:buNone/>
-            </a:pPr>
-            <a:r>
-              <a:rPr lang="en-US" sz="4000" b="1" dirty="0">
+          <a:p>
+            <a:pPr marL="342900" indent="-342900">
+              <a:spcAft>
+                <a:spcPts val="600"/>
+              </a:spcAft>
+              <a:buSzPct val="100000"/>
+              <a:buChar char="•"/>
+            </a:pPr>
+            <a:r>
+              <a:rPr lang="en-US" sz="1300" dirty="0">
                 <a:solidFill>
                   <a:srgbClr val="1B2430"/>
                 </a:solidFill>
-                <a:latin typeface="Cambria" pitchFamily="34" charset="0"/>
-                <a:ea typeface="Cambria" pitchFamily="34" charset="-122"/>
-                <a:cs typeface="Cambria" pitchFamily="34" charset="-120"/>
-              </a:rPr>
-              <a:t>24 / 24</a:t>
-            </a:r>
-            <a:endParaRPr lang="en-US" sz="4000" dirty="0"/>
-          </a:p>
-        </p:txBody>
-      </p:sp>
-      <p:sp>
-        <p:nvSpPr>
-          <p:cNvPr id="12" name="Text 10"/>
-          <p:cNvSpPr txBox="1"/>
-          <p:nvPr/>
-        </p:nvSpPr>
-        <p:spPr>
-          <a:xfrm>
-            <a:off x="685800" y="3566160"/>
-            <a:ext cx="3566160" cy="502920"/>
-          </a:xfrm>
-          <a:prstGeom prst="rect">
-            <a:avLst/>
-          </a:prstGeom>
-          <a:noFill/>
-          <a:ln/>
-        </p:spPr>
-        <p:txBody>
-          <a:bodyPr wrap="square" lIns="0" tIns="0" rIns="0" bIns="0" rtlCol="0" anchor="ctr"/>
-          <a:lstStyle/>
-          <a:p>
-            <a:pPr indent="0" marL="0">
-              <a:buNone/>
+                <a:latin typeface="Calibri" pitchFamily="34" charset="0"/>
+                <a:ea typeface="Calibri" pitchFamily="34" charset="-122"/>
+                <a:cs typeface="Calibri" pitchFamily="34" charset="-120"/>
+              </a:rPr>
+              <a:t>Numbers parsed exactly in one pass (Clinger's fast path)</a:t>
+            </a:r>
+            <a:endParaRPr lang="en-US" sz="1300" dirty="0"/>
+          </a:p>
+          <a:p>
+            <a:pPr marL="342900" indent="-342900">
+              <a:spcAft>
+                <a:spcPts val="600"/>
+              </a:spcAft>
+              <a:buSzPct val="100000"/>
+              <a:buChar char="•"/>
             </a:pPr>
             <a:r>
               <a:rPr lang="en-US" sz="1300" dirty="0">
                 <a:solidFill>
-                  <a:srgbClr val="5B6573"/>
-                </a:solidFill>
-                <a:latin typeface="Calibri" pitchFamily="34" charset="0"/>
-                <a:ea typeface="Calibri" pitchFamily="34" charset="-122"/>
-                <a:cs typeface="Calibri" pitchFamily="34" charset="-120"/>
-              </a:rPr>
-              <a:t>injected mistakes reported before processing</a:t>
-            </a:r>
-            <a:endParaRPr lang="en-US" sz="1300" dirty="0"/>
-          </a:p>
-        </p:txBody>
-      </p:sp>
-      <p:sp>
-        <p:nvSpPr>
-          <p:cNvPr id="13" name="Shape 11"/>
-          <p:cNvSpPr/>
-          <p:nvPr/>
-        </p:nvSpPr>
-        <p:spPr>
-          <a:xfrm>
-            <a:off x="4663440" y="2788920"/>
-            <a:ext cx="4023360" cy="1463040"/>
-          </a:xfrm>
-          <a:prstGeom prst="roundRect">
-            <a:avLst>
-              <a:gd name="adj" fmla="val 5000"/>
-            </a:avLst>
-          </a:prstGeom>
-          <a:solidFill>
-            <a:srgbClr val="EEF1F4"/>
-          </a:solidFill>
-          <a:ln w="12700">
-            <a:solidFill>
-              <a:srgbClr val="EEF1F4"/>
-            </a:solidFill>
-            <a:prstDash val="solid"/>
-          </a:ln>
-        </p:spPr>
-      </p:sp>
-      <p:sp>
-        <p:nvSpPr>
-          <p:cNvPr id="14" name="Text 12"/>
-          <p:cNvSpPr txBox="1"/>
-          <p:nvPr/>
-        </p:nvSpPr>
-        <p:spPr>
-          <a:xfrm>
-            <a:off x="4892040" y="2880360"/>
-            <a:ext cx="3566160" cy="685800"/>
-          </a:xfrm>
-          <a:prstGeom prst="rect">
-            <a:avLst/>
-          </a:prstGeom>
-          <a:noFill/>
-          <a:ln/>
-        </p:spPr>
-        <p:txBody>
-          <a:bodyPr wrap="square" lIns="0" tIns="0" rIns="0" bIns="0" rtlCol="0" anchor="ctr"/>
-          <a:lstStyle/>
-          <a:p>
-            <a:pPr indent="0" marL="0">
-              <a:buNone/>
-            </a:pPr>
-            <a:r>
-              <a:rPr lang="en-US" sz="4000" b="1" dirty="0">
-                <a:solidFill>
-                  <a:srgbClr val="23867A"/>
-                </a:solidFill>
-                <a:latin typeface="Cambria" pitchFamily="34" charset="0"/>
-                <a:ea typeface="Cambria" pitchFamily="34" charset="-122"/>
-                <a:cs typeface="Cambria" pitchFamily="34" charset="-120"/>
-              </a:rPr>
-              <a:t>18 / 44</a:t>
-            </a:r>
-            <a:endParaRPr lang="en-US" sz="4000" dirty="0"/>
-          </a:p>
-        </p:txBody>
-      </p:sp>
-      <p:sp>
-        <p:nvSpPr>
-          <p:cNvPr id="15" name="Text 13"/>
-          <p:cNvSpPr txBox="1"/>
-          <p:nvPr/>
-        </p:nvSpPr>
-        <p:spPr>
-          <a:xfrm>
-            <a:off x="4892040" y="3566160"/>
-            <a:ext cx="3566160" cy="502920"/>
-          </a:xfrm>
-          <a:prstGeom prst="rect">
-            <a:avLst/>
-          </a:prstGeom>
-          <a:noFill/>
-          <a:ln/>
-        </p:spPr>
-        <p:txBody>
-          <a:bodyPr wrap="square" lIns="0" tIns="0" rIns="0" bIns="0" rtlCol="0" anchor="ctr"/>
-          <a:lstStyle/>
-          <a:p>
-            <a:pPr indent="0" marL="0">
-              <a:buNone/>
-            </a:pPr>
-            <a:r>
-              <a:rPr lang="en-US" sz="1300" dirty="0">
-                <a:solidFill>
-                  <a:srgbClr val="5B6573"/>
-                </a:solidFill>
-                <a:latin typeface="Calibri" pitchFamily="34" charset="0"/>
-                <a:ea typeface="Calibri" pitchFamily="34" charset="-122"/>
-                <a:cs typeface="Calibri" pitchFamily="34" charset="-120"/>
-              </a:rPr>
-              <a:t>real GitHub failures reported before processing</a:t>
+                  <a:srgbClr val="1B2430"/>
+                </a:solidFill>
+                <a:latin typeface="Calibri" pitchFamily="34" charset="0"/>
+                <a:ea typeface="Calibri" pitchFamily="34" charset="-122"/>
+                <a:cs typeface="Calibri" pitchFamily="34" charset="-120"/>
+              </a:rPr>
+              <a:t>CRC-32 on its own thread; merge in file order gives the same facts and line numbers</a:t>
             </a:r>
             <a:endParaRPr lang="en-US" sz="1300" dirty="0"/>
           </a:p>
@@ -3507,7 +3621,7 @@
                 <a:ea typeface="Cambria" pitchFamily="34" charset="-122"/>
                 <a:cs typeface="Cambria" pitchFamily="34" charset="-120"/>
               </a:rPr>
-              <a:t>Demonstration</a:t>
+              <a:t>Testing and evaluation</a:t>
             </a:r>
             <a:endParaRPr lang="en-US" sz="2800" dirty="0"/>
           </a:p>
@@ -3522,17 +3636,19 @@
         <p:spPr>
           <a:xfrm>
             <a:off x="457200" y="1097280"/>
-            <a:ext cx="384048" cy="384048"/>
-          </a:xfrm>
-          <a:prstGeom prst="ellipse">
-            <a:avLst/>
+            <a:ext cx="4023360" cy="1463040"/>
+          </a:xfrm>
+          <a:prstGeom prst="roundRect">
+            <a:avLst>
+              <a:gd name="adj" fmla="val 5000"/>
+            </a:avLst>
           </a:prstGeom>
           <a:solidFill>
-            <a:srgbClr val="E8A33D"/>
+            <a:srgbClr val="EEF1F4"/>
           </a:solidFill>
           <a:ln w="12700">
             <a:solidFill>
-              <a:srgbClr val="E8A33D"/>
+              <a:srgbClr val="EEF1F4"/>
             </a:solidFill>
             <a:prstDash val="solid"/>
           </a:ln>
@@ -3546,34 +3662,34 @@
         </p:nvSpPr>
         <p:spPr>
           <a:xfrm>
-            <a:off x="457200" y="1097280"/>
-            <a:ext cx="384048" cy="384048"/>
-          </a:xfrm>
-          <a:prstGeom prst="rect">
-            <a:avLst/>
-          </a:prstGeom>
-          <a:noFill/>
-          <a:ln/>
-        </p:spPr>
-        <p:txBody>
-          <a:bodyPr wrap="square" lIns="0" tIns="0" rIns="0" bIns="0" rtlCol="0" anchor="ctr"/>
-          <a:lstStyle/>
-          <a:p>
-            <a:pPr algn="ctr" indent="0" marL="0">
-              <a:buNone/>
-            </a:pPr>
-            <a:r>
-              <a:rPr lang="en-US" sz="1400" b="1" dirty="0">
+            <a:off x="685800" y="1188720"/>
+            <a:ext cx="3566160" cy="685800"/>
+          </a:xfrm>
+          <a:prstGeom prst="rect">
+            <a:avLst/>
+          </a:prstGeom>
+          <a:noFill/>
+          <a:ln/>
+        </p:spPr>
+        <p:txBody>
+          <a:bodyPr wrap="square" lIns="0" tIns="0" rIns="0" bIns="0" rtlCol="0" anchor="ctr"/>
+          <a:lstStyle/>
+          <a:p>
+            <a:pPr indent="0" marL="0">
+              <a:buNone/>
+            </a:pPr>
+            <a:r>
+              <a:rPr lang="en-US" sz="4000" b="1" dirty="0">
                 <a:solidFill>
                   <a:srgbClr val="1B2430"/>
                 </a:solidFill>
-                <a:latin typeface="Calibri" pitchFamily="34" charset="0"/>
-                <a:ea typeface="Calibri" pitchFamily="34" charset="-122"/>
-                <a:cs typeface="Calibri" pitchFamily="34" charset="-120"/>
-              </a:rPr>
-              <a:t>1</a:t>
-            </a:r>
-            <a:endParaRPr lang="en-US" sz="1400" dirty="0"/>
+                <a:latin typeface="Cambria" pitchFamily="34" charset="0"/>
+                <a:ea typeface="Cambria" pitchFamily="34" charset="-122"/>
+                <a:cs typeface="Cambria" pitchFamily="34" charset="-120"/>
+              </a:rPr>
+              <a:t>207</a:t>
+            </a:r>
+            <a:endParaRPr lang="en-US" sz="4000" dirty="0"/>
           </a:p>
         </p:txBody>
       </p:sp>
@@ -3585,63 +3701,24 @@
         </p:nvSpPr>
         <p:spPr>
           <a:xfrm>
-            <a:off x="1005840" y="1133856"/>
-            <a:ext cx="2194560" cy="320040"/>
-          </a:xfrm>
-          <a:prstGeom prst="rect">
-            <a:avLst/>
-          </a:prstGeom>
-          <a:noFill/>
-          <a:ln/>
-        </p:spPr>
-        <p:txBody>
-          <a:bodyPr wrap="square" lIns="0" tIns="0" rIns="0" bIns="0" rtlCol="0" anchor="ctr"/>
-          <a:lstStyle/>
-          <a:p>
-            <a:pPr indent="0" marL="0">
-              <a:buNone/>
-            </a:pPr>
-            <a:r>
-              <a:rPr lang="en-US" sz="1600" b="1" dirty="0">
-                <a:solidFill>
-                  <a:srgbClr val="1B2430"/>
-                </a:solidFill>
-                <a:latin typeface="Calibri" pitchFamily="34" charset="0"/>
-                <a:ea typeface="Calibri" pitchFamily="34" charset="-122"/>
-                <a:cs typeface="Calibri" pitchFamily="34" charset="-120"/>
-              </a:rPr>
-              <a:t>Build</a:t>
-            </a:r>
-            <a:endParaRPr lang="en-US" sz="1600" dirty="0"/>
-          </a:p>
-        </p:txBody>
-      </p:sp>
-      <p:sp>
-        <p:nvSpPr>
-          <p:cNvPr id="7" name="Text 5"/>
-          <p:cNvSpPr txBox="1"/>
-          <p:nvPr/>
-        </p:nvSpPr>
-        <p:spPr>
-          <a:xfrm>
-            <a:off x="3200400" y="1133856"/>
-            <a:ext cx="5486400" cy="320040"/>
-          </a:xfrm>
-          <a:prstGeom prst="rect">
-            <a:avLst/>
-          </a:prstGeom>
-          <a:noFill/>
-          <a:ln/>
-        </p:spPr>
-        <p:txBody>
-          <a:bodyPr wrap="square" lIns="0" tIns="0" rIns="0" bIns="0" rtlCol="0" anchor="ctr"/>
-          <a:lstStyle/>
-          <a:p>
-            <a:pPr indent="0" marL="0">
-              <a:buNone/>
-            </a:pPr>
-            <a:r>
-              <a:rPr lang="en-US" sz="1500" dirty="0">
+            <a:off x="685800" y="1874520"/>
+            <a:ext cx="3566160" cy="502920"/>
+          </a:xfrm>
+          <a:prstGeom prst="rect">
+            <a:avLst/>
+          </a:prstGeom>
+          <a:noFill/>
+          <a:ln/>
+        </p:spPr>
+        <p:txBody>
+          <a:bodyPr wrap="square" lIns="0" tIns="0" rIns="0" bIns="0" rtlCol="0" anchor="ctr"/>
+          <a:lstStyle/>
+          <a:p>
+            <a:pPr indent="0" marL="0">
+              <a:buNone/>
+            </a:pPr>
+            <a:r>
+              <a:rPr lang="en-US" sz="1300" dirty="0">
                 <a:solidFill>
                   <a:srgbClr val="5B6573"/>
                 </a:solidFill>
@@ -3649,32 +3726,34 @@
                 <a:ea typeface="Calibri" pitchFamily="34" charset="-122"/>
                 <a:cs typeface="Calibri" pitchFamily="34" charset="-120"/>
               </a:rPr>
-              <a:t>Ctrl + Shift + B in VS Code</a:t>
-            </a:r>
-            <a:endParaRPr lang="en-US" sz="1500" dirty="0"/>
-          </a:p>
-        </p:txBody>
-      </p:sp>
-      <p:sp>
-        <p:nvSpPr>
-          <p:cNvPr id="8" name="Shape 6"/>
+              <a:t>unit tests in 9 programs, all passing</a:t>
+            </a:r>
+            <a:endParaRPr lang="en-US" sz="1300" dirty="0"/>
+          </a:p>
+        </p:txBody>
+      </p:sp>
+      <p:sp>
+        <p:nvSpPr>
+          <p:cNvPr id="7" name="Shape 5"/>
           <p:cNvSpPr/>
           <p:nvPr/>
         </p:nvSpPr>
         <p:spPr>
           <a:xfrm>
-            <a:off x="457200" y="1810512"/>
-            <a:ext cx="384048" cy="384048"/>
-          </a:xfrm>
-          <a:prstGeom prst="ellipse">
-            <a:avLst/>
+            <a:off x="4663440" y="1097280"/>
+            <a:ext cx="4023360" cy="1463040"/>
+          </a:xfrm>
+          <a:prstGeom prst="roundRect">
+            <a:avLst>
+              <a:gd name="adj" fmla="val 5000"/>
+            </a:avLst>
           </a:prstGeom>
           <a:solidFill>
-            <a:srgbClr val="E8A33D"/>
+            <a:srgbClr val="EEF1F4"/>
           </a:solidFill>
           <a:ln w="12700">
             <a:solidFill>
-              <a:srgbClr val="E8A33D"/>
+              <a:srgbClr val="EEF1F4"/>
             </a:solidFill>
             <a:prstDash val="solid"/>
           </a:ln>
@@ -3682,108 +3761,69 @@
       </p:sp>
       <p:sp>
         <p:nvSpPr>
+          <p:cNvPr id="8" name="Text 6"/>
+          <p:cNvSpPr txBox="1"/>
+          <p:nvPr/>
+        </p:nvSpPr>
+        <p:spPr>
+          <a:xfrm>
+            <a:off x="4892040" y="1188720"/>
+            <a:ext cx="3566160" cy="685800"/>
+          </a:xfrm>
+          <a:prstGeom prst="rect">
+            <a:avLst/>
+          </a:prstGeom>
+          <a:noFill/>
+          <a:ln/>
+        </p:spPr>
+        <p:txBody>
+          <a:bodyPr wrap="square" lIns="0" tIns="0" rIns="0" bIns="0" rtlCol="0" anchor="ctr"/>
+          <a:lstStyle/>
+          <a:p>
+            <a:pPr indent="0" marL="0">
+              <a:buNone/>
+            </a:pPr>
+            <a:r>
+              <a:rPr lang="en-US" sz="4000" b="1" dirty="0">
+                <a:solidFill>
+                  <a:srgbClr val="23867A"/>
+                </a:solidFill>
+                <a:latin typeface="Cambria" pitchFamily="34" charset="0"/>
+                <a:ea typeface="Cambria" pitchFamily="34" charset="-122"/>
+                <a:cs typeface="Cambria" pitchFamily="34" charset="-120"/>
+              </a:rPr>
+              <a:t>17</a:t>
+            </a:r>
+            <a:endParaRPr lang="en-US" sz="4000" dirty="0"/>
+          </a:p>
+        </p:txBody>
+      </p:sp>
+      <p:sp>
+        <p:nvSpPr>
           <p:cNvPr id="9" name="Text 7"/>
           <p:cNvSpPr txBox="1"/>
           <p:nvPr/>
         </p:nvSpPr>
         <p:spPr>
           <a:xfrm>
-            <a:off x="457200" y="1810512"/>
-            <a:ext cx="384048" cy="384048"/>
-          </a:xfrm>
-          <a:prstGeom prst="rect">
-            <a:avLst/>
-          </a:prstGeom>
-          <a:noFill/>
-          <a:ln/>
-        </p:spPr>
-        <p:txBody>
-          <a:bodyPr wrap="square" lIns="0" tIns="0" rIns="0" bIns="0" rtlCol="0" anchor="ctr"/>
-          <a:lstStyle/>
-          <a:p>
-            <a:pPr algn="ctr" indent="0" marL="0">
-              <a:buNone/>
-            </a:pPr>
-            <a:r>
-              <a:rPr lang="en-US" sz="1400" b="1" dirty="0">
-                <a:solidFill>
-                  <a:srgbClr val="1B2430"/>
-                </a:solidFill>
-                <a:latin typeface="Calibri" pitchFamily="34" charset="0"/>
-                <a:ea typeface="Calibri" pitchFamily="34" charset="-122"/>
-                <a:cs typeface="Calibri" pitchFamily="34" charset="-120"/>
-              </a:rPr>
-              <a:t>2</a:t>
-            </a:r>
-            <a:endParaRPr lang="en-US" sz="1400" dirty="0"/>
-          </a:p>
-        </p:txBody>
-      </p:sp>
-      <p:sp>
-        <p:nvSpPr>
-          <p:cNvPr id="10" name="Text 8"/>
-          <p:cNvSpPr txBox="1"/>
-          <p:nvPr/>
-        </p:nvSpPr>
-        <p:spPr>
-          <a:xfrm>
-            <a:off x="1005840" y="1847088"/>
-            <a:ext cx="2194560" cy="320040"/>
-          </a:xfrm>
-          <a:prstGeom prst="rect">
-            <a:avLst/>
-          </a:prstGeom>
-          <a:noFill/>
-          <a:ln/>
-        </p:spPr>
-        <p:txBody>
-          <a:bodyPr wrap="square" lIns="0" tIns="0" rIns="0" bIns="0" rtlCol="0" anchor="ctr"/>
-          <a:lstStyle/>
-          <a:p>
-            <a:pPr indent="0" marL="0">
-              <a:buNone/>
-            </a:pPr>
-            <a:r>
-              <a:rPr lang="en-US" sz="1600" b="1" dirty="0">
-                <a:solidFill>
-                  <a:srgbClr val="1B2430"/>
-                </a:solidFill>
-                <a:latin typeface="Calibri" pitchFamily="34" charset="0"/>
-                <a:ea typeface="Calibri" pitchFamily="34" charset="-122"/>
-                <a:cs typeface="Calibri" pitchFamily="34" charset="-120"/>
-              </a:rPr>
-              <a:t>Compile and run</a:t>
-            </a:r>
-            <a:endParaRPr lang="en-US" sz="1600" dirty="0"/>
-          </a:p>
-        </p:txBody>
-      </p:sp>
-      <p:sp>
-        <p:nvSpPr>
-          <p:cNvPr id="11" name="Text 9"/>
-          <p:cNvSpPr txBox="1"/>
-          <p:nvPr/>
-        </p:nvSpPr>
-        <p:spPr>
-          <a:xfrm>
-            <a:off x="3200400" y="1847088"/>
-            <a:ext cx="5486400" cy="320040"/>
-          </a:xfrm>
-          <a:prstGeom prst="rect">
-            <a:avLst/>
-          </a:prstGeom>
-          <a:noFill/>
-          <a:ln/>
-        </p:spPr>
-        <p:txBody>
-          <a:bodyPr wrap="square" lIns="0" tIns="0" rIns="0" bIns="0" rtlCol="0" anchor="ctr"/>
-          <a:lstStyle/>
-          <a:p>
-            <a:pPr indent="0" marL="0">
-              <a:buNone/>
-            </a:pPr>
-            <a:r>
-              <a:rPr lang="en-US" sz="1500" dirty="0">
+            <a:off x="4892040" y="1874520"/>
+            <a:ext cx="3566160" cy="502920"/>
+          </a:xfrm>
+          <a:prstGeom prst="rect">
+            <a:avLst/>
+          </a:prstGeom>
+          <a:noFill/>
+          <a:ln/>
+        </p:spPr>
+        <p:txBody>
+          <a:bodyPr wrap="square" lIns="0" tIns="0" rIns="0" bIns="0" rtlCol="0" anchor="ctr"/>
+          <a:lstStyle/>
+          <a:p>
+            <a:pPr indent="0" marL="0">
+              <a:buNone/>
+            </a:pPr>
+            <a:r>
+              <a:rPr lang="en-US" sz="1300" dirty="0">
                 <a:solidFill>
                   <a:srgbClr val="5B6573"/>
                 </a:solidFill>
@@ -3791,32 +3831,34 @@
                 <a:ea typeface="Calibri" pitchFamily="34" charset="-122"/>
                 <a:cs typeface="Calibri" pitchFamily="34" charset="-120"/>
               </a:rPr>
-              <a:t>students.prep: every phase, then the cleaned file</a:t>
-            </a:r>
-            <a:endParaRPr lang="en-US" sz="1500" dirty="0"/>
-          </a:p>
-        </p:txBody>
-      </p:sp>
-      <p:sp>
-        <p:nvSpPr>
-          <p:cNvPr id="12" name="Shape 10"/>
+              <a:t>recorded test cases: valid, invalid, boundary, run time</a:t>
+            </a:r>
+            <a:endParaRPr lang="en-US" sz="1300" dirty="0"/>
+          </a:p>
+        </p:txBody>
+      </p:sp>
+      <p:sp>
+        <p:nvSpPr>
+          <p:cNvPr id="10" name="Shape 8"/>
           <p:cNvSpPr/>
           <p:nvPr/>
         </p:nvSpPr>
         <p:spPr>
           <a:xfrm>
-            <a:off x="457200" y="2523744"/>
-            <a:ext cx="384048" cy="384048"/>
-          </a:xfrm>
-          <a:prstGeom prst="ellipse">
-            <a:avLst/>
+            <a:off x="457200" y="2788920"/>
+            <a:ext cx="4023360" cy="1463040"/>
+          </a:xfrm>
+          <a:prstGeom prst="roundRect">
+            <a:avLst>
+              <a:gd name="adj" fmla="val 5000"/>
+            </a:avLst>
           </a:prstGeom>
           <a:solidFill>
-            <a:srgbClr val="E8A33D"/>
+            <a:srgbClr val="EEF1F4"/>
           </a:solidFill>
           <a:ln w="12700">
             <a:solidFill>
-              <a:srgbClr val="E8A33D"/>
+              <a:srgbClr val="EEF1F4"/>
             </a:solidFill>
             <a:prstDash val="solid"/>
           </a:ln>
@@ -3824,108 +3866,69 @@
       </p:sp>
       <p:sp>
         <p:nvSpPr>
-          <p:cNvPr id="13" name="Text 11"/>
-          <p:cNvSpPr txBox="1"/>
-          <p:nvPr/>
-        </p:nvSpPr>
-        <p:spPr>
-          <a:xfrm>
-            <a:off x="457200" y="2523744"/>
-            <a:ext cx="384048" cy="384048"/>
-          </a:xfrm>
-          <a:prstGeom prst="rect">
-            <a:avLst/>
-          </a:prstGeom>
-          <a:noFill/>
-          <a:ln/>
-        </p:spPr>
-        <p:txBody>
-          <a:bodyPr wrap="square" lIns="0" tIns="0" rIns="0" bIns="0" rtlCol="0" anchor="ctr"/>
-          <a:lstStyle/>
-          <a:p>
-            <a:pPr algn="ctr" indent="0" marL="0">
-              <a:buNone/>
-            </a:pPr>
-            <a:r>
-              <a:rPr lang="en-US" sz="1400" b="1" dirty="0">
+          <p:cNvPr id="11" name="Text 9"/>
+          <p:cNvSpPr txBox="1"/>
+          <p:nvPr/>
+        </p:nvSpPr>
+        <p:spPr>
+          <a:xfrm>
+            <a:off x="685800" y="2880360"/>
+            <a:ext cx="3566160" cy="685800"/>
+          </a:xfrm>
+          <a:prstGeom prst="rect">
+            <a:avLst/>
+          </a:prstGeom>
+          <a:noFill/>
+          <a:ln/>
+        </p:spPr>
+        <p:txBody>
+          <a:bodyPr wrap="square" lIns="0" tIns="0" rIns="0" bIns="0" rtlCol="0" anchor="ctr"/>
+          <a:lstStyle/>
+          <a:p>
+            <a:pPr indent="0" marL="0">
+              <a:buNone/>
+            </a:pPr>
+            <a:r>
+              <a:rPr lang="en-US" sz="4000" b="1" dirty="0">
                 <a:solidFill>
                   <a:srgbClr val="1B2430"/>
                 </a:solidFill>
-                <a:latin typeface="Calibri" pitchFamily="34" charset="0"/>
-                <a:ea typeface="Calibri" pitchFamily="34" charset="-122"/>
-                <a:cs typeface="Calibri" pitchFamily="34" charset="-120"/>
-              </a:rPr>
-              <a:t>3</a:t>
-            </a:r>
-            <a:endParaRPr lang="en-US" sz="1400" dirty="0"/>
-          </a:p>
-        </p:txBody>
-      </p:sp>
-      <p:sp>
-        <p:nvSpPr>
-          <p:cNvPr id="14" name="Text 12"/>
-          <p:cNvSpPr txBox="1"/>
-          <p:nvPr/>
-        </p:nvSpPr>
-        <p:spPr>
-          <a:xfrm>
-            <a:off x="1005840" y="2560320"/>
-            <a:ext cx="2194560" cy="320040"/>
-          </a:xfrm>
-          <a:prstGeom prst="rect">
-            <a:avLst/>
-          </a:prstGeom>
-          <a:noFill/>
-          <a:ln/>
-        </p:spPr>
-        <p:txBody>
-          <a:bodyPr wrap="square" lIns="0" tIns="0" rIns="0" bIns="0" rtlCol="0" anchor="ctr"/>
-          <a:lstStyle/>
-          <a:p>
-            <a:pPr indent="0" marL="0">
-              <a:buNone/>
-            </a:pPr>
-            <a:r>
-              <a:rPr lang="en-US" sz="1600" b="1" dirty="0">
-                <a:solidFill>
-                  <a:srgbClr val="1B2430"/>
-                </a:solidFill>
-                <a:latin typeface="Calibri" pitchFamily="34" charset="0"/>
-                <a:ea typeface="Calibri" pitchFamily="34" charset="-122"/>
-                <a:cs typeface="Calibri" pitchFamily="34" charset="-120"/>
-              </a:rPr>
-              <a:t>See the errors</a:t>
-            </a:r>
-            <a:endParaRPr lang="en-US" sz="1600" dirty="0"/>
-          </a:p>
-        </p:txBody>
-      </p:sp>
-      <p:sp>
-        <p:nvSpPr>
-          <p:cNvPr id="15" name="Text 13"/>
-          <p:cNvSpPr txBox="1"/>
-          <p:nvPr/>
-        </p:nvSpPr>
-        <p:spPr>
-          <a:xfrm>
-            <a:off x="3200400" y="2560320"/>
-            <a:ext cx="5486400" cy="320040"/>
-          </a:xfrm>
-          <a:prstGeom prst="rect">
-            <a:avLst/>
-          </a:prstGeom>
-          <a:noFill/>
-          <a:ln/>
-        </p:spPr>
-        <p:txBody>
-          <a:bodyPr wrap="square" lIns="0" tIns="0" rIns="0" bIns="0" rtlCol="0" anchor="ctr"/>
-          <a:lstStyle/>
-          <a:p>
-            <a:pPr indent="0" marL="0">
-              <a:buNone/>
-            </a:pPr>
-            <a:r>
-              <a:rPr lang="en-US" sz="1500" dirty="0">
+                <a:latin typeface="Cambria" pitchFamily="34" charset="0"/>
+                <a:ea typeface="Cambria" pitchFamily="34" charset="-122"/>
+                <a:cs typeface="Cambria" pitchFamily="34" charset="-120"/>
+              </a:rPr>
+              <a:t>24 / 24</a:t>
+            </a:r>
+            <a:endParaRPr lang="en-US" sz="4000" dirty="0"/>
+          </a:p>
+        </p:txBody>
+      </p:sp>
+      <p:sp>
+        <p:nvSpPr>
+          <p:cNvPr id="12" name="Text 10"/>
+          <p:cNvSpPr txBox="1"/>
+          <p:nvPr/>
+        </p:nvSpPr>
+        <p:spPr>
+          <a:xfrm>
+            <a:off x="685800" y="3566160"/>
+            <a:ext cx="3566160" cy="502920"/>
+          </a:xfrm>
+          <a:prstGeom prst="rect">
+            <a:avLst/>
+          </a:prstGeom>
+          <a:noFill/>
+          <a:ln/>
+        </p:spPr>
+        <p:txBody>
+          <a:bodyPr wrap="square" lIns="0" tIns="0" rIns="0" bIns="0" rtlCol="0" anchor="ctr"/>
+          <a:lstStyle/>
+          <a:p>
+            <a:pPr indent="0" marL="0">
+              <a:buNone/>
+            </a:pPr>
+            <a:r>
+              <a:rPr lang="en-US" sz="1300" dirty="0">
                 <a:solidFill>
                   <a:srgbClr val="5B6573"/>
                 </a:solidFill>
@@ -3933,32 +3936,34 @@
                 <a:ea typeface="Calibri" pitchFamily="34" charset="-122"/>
                 <a:cs typeface="Calibri" pitchFamily="34" charset="-120"/>
               </a:rPr>
-              <a:t>examples/errors: line, caret and hint</a:t>
-            </a:r>
-            <a:endParaRPr lang="en-US" sz="1500" dirty="0"/>
-          </a:p>
-        </p:txBody>
-      </p:sp>
-      <p:sp>
-        <p:nvSpPr>
-          <p:cNvPr id="16" name="Shape 14"/>
+              <a:t>injected mistakes reported before processing</a:t>
+            </a:r>
+            <a:endParaRPr lang="en-US" sz="1300" dirty="0"/>
+          </a:p>
+        </p:txBody>
+      </p:sp>
+      <p:sp>
+        <p:nvSpPr>
+          <p:cNvPr id="13" name="Shape 11"/>
           <p:cNvSpPr/>
           <p:nvPr/>
         </p:nvSpPr>
         <p:spPr>
           <a:xfrm>
-            <a:off x="457200" y="3236976"/>
-            <a:ext cx="384048" cy="384048"/>
-          </a:xfrm>
-          <a:prstGeom prst="ellipse">
-            <a:avLst/>
+            <a:off x="4663440" y="2788920"/>
+            <a:ext cx="4023360" cy="1463040"/>
+          </a:xfrm>
+          <a:prstGeom prst="roundRect">
+            <a:avLst>
+              <a:gd name="adj" fmla="val 5000"/>
+            </a:avLst>
           </a:prstGeom>
           <a:solidFill>
-            <a:srgbClr val="E8A33D"/>
+            <a:srgbClr val="EEF1F4"/>
           </a:solidFill>
           <a:ln w="12700">
             <a:solidFill>
-              <a:srgbClr val="E8A33D"/>
+              <a:srgbClr val="EEF1F4"/>
             </a:solidFill>
             <a:prstDash val="solid"/>
           </a:ln>
@@ -3966,108 +3971,69 @@
       </p:sp>
       <p:sp>
         <p:nvSpPr>
-          <p:cNvPr id="17" name="Text 15"/>
-          <p:cNvSpPr txBox="1"/>
-          <p:nvPr/>
-        </p:nvSpPr>
-        <p:spPr>
-          <a:xfrm>
-            <a:off x="457200" y="3236976"/>
-            <a:ext cx="384048" cy="384048"/>
-          </a:xfrm>
-          <a:prstGeom prst="rect">
-            <a:avLst/>
-          </a:prstGeom>
-          <a:noFill/>
-          <a:ln/>
-        </p:spPr>
-        <p:txBody>
-          <a:bodyPr wrap="square" lIns="0" tIns="0" rIns="0" bIns="0" rtlCol="0" anchor="ctr"/>
-          <a:lstStyle/>
-          <a:p>
-            <a:pPr algn="ctr" indent="0" marL="0">
-              <a:buNone/>
-            </a:pPr>
-            <a:r>
-              <a:rPr lang="en-US" sz="1400" b="1" dirty="0">
-                <a:solidFill>
-                  <a:srgbClr val="1B2430"/>
-                </a:solidFill>
-                <a:latin typeface="Calibri" pitchFamily="34" charset="0"/>
-                <a:ea typeface="Calibri" pitchFamily="34" charset="-122"/>
-                <a:cs typeface="Calibri" pitchFamily="34" charset="-120"/>
-              </a:rPr>
-              <a:t>4</a:t>
-            </a:r>
-            <a:endParaRPr lang="en-US" sz="1400" dirty="0"/>
-          </a:p>
-        </p:txBody>
-      </p:sp>
-      <p:sp>
-        <p:nvSpPr>
-          <p:cNvPr id="18" name="Text 16"/>
-          <p:cNvSpPr txBox="1"/>
-          <p:nvPr/>
-        </p:nvSpPr>
-        <p:spPr>
-          <a:xfrm>
-            <a:off x="1005840" y="3273552"/>
-            <a:ext cx="2194560" cy="320040"/>
-          </a:xfrm>
-          <a:prstGeom prst="rect">
-            <a:avLst/>
-          </a:prstGeom>
-          <a:noFill/>
-          <a:ln/>
-        </p:spPr>
-        <p:txBody>
-          <a:bodyPr wrap="square" lIns="0" tIns="0" rIns="0" bIns="0" rtlCol="0" anchor="ctr"/>
-          <a:lstStyle/>
-          <a:p>
-            <a:pPr indent="0" marL="0">
-              <a:buNone/>
-            </a:pPr>
-            <a:r>
-              <a:rPr lang="en-US" sz="1600" b="1" dirty="0">
-                <a:solidFill>
-                  <a:srgbClr val="1B2430"/>
-                </a:solidFill>
-                <a:latin typeface="Calibri" pitchFamily="34" charset="0"/>
-                <a:ea typeface="Calibri" pitchFamily="34" charset="-122"/>
-                <a:cs typeface="Calibri" pitchFamily="34" charset="-120"/>
-              </a:rPr>
-              <a:t>Certificate</a:t>
-            </a:r>
-            <a:endParaRPr lang="en-US" sz="1600" dirty="0"/>
-          </a:p>
-        </p:txBody>
-      </p:sp>
-      <p:sp>
-        <p:nvSpPr>
-          <p:cNvPr id="19" name="Text 17"/>
-          <p:cNvSpPr txBox="1"/>
-          <p:nvPr/>
-        </p:nvSpPr>
-        <p:spPr>
-          <a:xfrm>
-            <a:off x="3200400" y="3273552"/>
-            <a:ext cx="5486400" cy="320040"/>
-          </a:xfrm>
-          <a:prstGeom prst="rect">
-            <a:avLst/>
-          </a:prstGeom>
-          <a:noFill/>
-          <a:ln/>
-        </p:spPr>
-        <p:txBody>
-          <a:bodyPr wrap="square" lIns="0" tIns="0" rIns="0" bIns="0" rtlCol="0" anchor="ctr"/>
-          <a:lstStyle/>
-          <a:p>
-            <a:pPr indent="0" marL="0">
-              <a:buNone/>
-            </a:pPr>
-            <a:r>
-              <a:rPr lang="en-US" sz="1500" dirty="0">
+          <p:cNvPr id="14" name="Text 12"/>
+          <p:cNvSpPr txBox="1"/>
+          <p:nvPr/>
+        </p:nvSpPr>
+        <p:spPr>
+          <a:xfrm>
+            <a:off x="4892040" y="2880360"/>
+            <a:ext cx="3566160" cy="685800"/>
+          </a:xfrm>
+          <a:prstGeom prst="rect">
+            <a:avLst/>
+          </a:prstGeom>
+          <a:noFill/>
+          <a:ln/>
+        </p:spPr>
+        <p:txBody>
+          <a:bodyPr wrap="square" lIns="0" tIns="0" rIns="0" bIns="0" rtlCol="0" anchor="ctr"/>
+          <a:lstStyle/>
+          <a:p>
+            <a:pPr indent="0" marL="0">
+              <a:buNone/>
+            </a:pPr>
+            <a:r>
+              <a:rPr lang="en-US" sz="4000" b="1" dirty="0">
+                <a:solidFill>
+                  <a:srgbClr val="23867A"/>
+                </a:solidFill>
+                <a:latin typeface="Cambria" pitchFamily="34" charset="0"/>
+                <a:ea typeface="Cambria" pitchFamily="34" charset="-122"/>
+                <a:cs typeface="Cambria" pitchFamily="34" charset="-120"/>
+              </a:rPr>
+              <a:t>18 / 44</a:t>
+            </a:r>
+            <a:endParaRPr lang="en-US" sz="4000" dirty="0"/>
+          </a:p>
+        </p:txBody>
+      </p:sp>
+      <p:sp>
+        <p:nvSpPr>
+          <p:cNvPr id="15" name="Text 13"/>
+          <p:cNvSpPr txBox="1"/>
+          <p:nvPr/>
+        </p:nvSpPr>
+        <p:spPr>
+          <a:xfrm>
+            <a:off x="4892040" y="3566160"/>
+            <a:ext cx="3566160" cy="502920"/>
+          </a:xfrm>
+          <a:prstGeom prst="rect">
+            <a:avLst/>
+          </a:prstGeom>
+          <a:noFill/>
+          <a:ln/>
+        </p:spPr>
+        <p:txBody>
+          <a:bodyPr wrap="square" lIns="0" tIns="0" rIns="0" bIns="0" rtlCol="0" anchor="ctr"/>
+          <a:lstStyle/>
+          <a:p>
+            <a:pPr indent="0" marL="0">
+              <a:buNone/>
+            </a:pPr>
+            <a:r>
+              <a:rPr lang="en-US" sz="1300" dirty="0">
                 <a:solidFill>
                   <a:srgbClr val="5B6573"/>
                 </a:solidFill>
@@ -4075,151 +4041,9 @@
                 <a:ea typeface="Calibri" pitchFamily="34" charset="-122"/>
                 <a:cs typeface="Calibri" pitchFamily="34" charset="-120"/>
               </a:rPr>
-              <a:t>--certificate, then run on a new batch and a bad one</a:t>
-            </a:r>
-            <a:endParaRPr lang="en-US" sz="1500" dirty="0"/>
-          </a:p>
-        </p:txBody>
-      </p:sp>
-      <p:sp>
-        <p:nvSpPr>
-          <p:cNvPr id="20" name="Shape 18"/>
-          <p:cNvSpPr/>
-          <p:nvPr/>
-        </p:nvSpPr>
-        <p:spPr>
-          <a:xfrm>
-            <a:off x="457200" y="3950208"/>
-            <a:ext cx="384048" cy="384048"/>
-          </a:xfrm>
-          <a:prstGeom prst="ellipse">
-            <a:avLst/>
-          </a:prstGeom>
-          <a:solidFill>
-            <a:srgbClr val="E8A33D"/>
-          </a:solidFill>
-          <a:ln w="12700">
-            <a:solidFill>
-              <a:srgbClr val="E8A33D"/>
-            </a:solidFill>
-            <a:prstDash val="solid"/>
-          </a:ln>
-        </p:spPr>
-      </p:sp>
-      <p:sp>
-        <p:nvSpPr>
-          <p:cNvPr id="21" name="Text 19"/>
-          <p:cNvSpPr txBox="1"/>
-          <p:nvPr/>
-        </p:nvSpPr>
-        <p:spPr>
-          <a:xfrm>
-            <a:off x="457200" y="3950208"/>
-            <a:ext cx="384048" cy="384048"/>
-          </a:xfrm>
-          <a:prstGeom prst="rect">
-            <a:avLst/>
-          </a:prstGeom>
-          <a:noFill/>
-          <a:ln/>
-        </p:spPr>
-        <p:txBody>
-          <a:bodyPr wrap="square" lIns="0" tIns="0" rIns="0" bIns="0" rtlCol="0" anchor="ctr"/>
-          <a:lstStyle/>
-          <a:p>
-            <a:pPr algn="ctr" indent="0" marL="0">
-              <a:buNone/>
-            </a:pPr>
-            <a:r>
-              <a:rPr lang="en-US" sz="1400" b="1" dirty="0">
-                <a:solidFill>
-                  <a:srgbClr val="1B2430"/>
-                </a:solidFill>
-                <a:latin typeface="Calibri" pitchFamily="34" charset="0"/>
-                <a:ea typeface="Calibri" pitchFamily="34" charset="-122"/>
-                <a:cs typeface="Calibri" pitchFamily="34" charset="-120"/>
-              </a:rPr>
-              <a:t>5</a:t>
-            </a:r>
-            <a:endParaRPr lang="en-US" sz="1400" dirty="0"/>
-          </a:p>
-        </p:txBody>
-      </p:sp>
-      <p:sp>
-        <p:nvSpPr>
-          <p:cNvPr id="22" name="Text 20"/>
-          <p:cNvSpPr txBox="1"/>
-          <p:nvPr/>
-        </p:nvSpPr>
-        <p:spPr>
-          <a:xfrm>
-            <a:off x="1005840" y="3986784"/>
-            <a:ext cx="2194560" cy="320040"/>
-          </a:xfrm>
-          <a:prstGeom prst="rect">
-            <a:avLst/>
-          </a:prstGeom>
-          <a:noFill/>
-          <a:ln/>
-        </p:spPr>
-        <p:txBody>
-          <a:bodyPr wrap="square" lIns="0" tIns="0" rIns="0" bIns="0" rtlCol="0" anchor="ctr"/>
-          <a:lstStyle/>
-          <a:p>
-            <a:pPr indent="0" marL="0">
-              <a:buNone/>
-            </a:pPr>
-            <a:r>
-              <a:rPr lang="en-US" sz="1600" b="1" dirty="0">
-                <a:solidFill>
-                  <a:srgbClr val="1B2430"/>
-                </a:solidFill>
-                <a:latin typeface="Calibri" pitchFamily="34" charset="0"/>
-                <a:ea typeface="Calibri" pitchFamily="34" charset="-122"/>
-                <a:cs typeface="Calibri" pitchFamily="34" charset="-120"/>
-              </a:rPr>
-              <a:t>Tests</a:t>
-            </a:r>
-            <a:endParaRPr lang="en-US" sz="1600" dirty="0"/>
-          </a:p>
-        </p:txBody>
-      </p:sp>
-      <p:sp>
-        <p:nvSpPr>
-          <p:cNvPr id="23" name="Text 21"/>
-          <p:cNvSpPr txBox="1"/>
-          <p:nvPr/>
-        </p:nvSpPr>
-        <p:spPr>
-          <a:xfrm>
-            <a:off x="3200400" y="3986784"/>
-            <a:ext cx="5486400" cy="320040"/>
-          </a:xfrm>
-          <a:prstGeom prst="rect">
-            <a:avLst/>
-          </a:prstGeom>
-          <a:noFill/>
-          <a:ln/>
-        </p:spPr>
-        <p:txBody>
-          <a:bodyPr wrap="square" lIns="0" tIns="0" rIns="0" bIns="0" rtlCol="0" anchor="ctr"/>
-          <a:lstStyle/>
-          <a:p>
-            <a:pPr indent="0" marL="0">
-              <a:buNone/>
-            </a:pPr>
-            <a:r>
-              <a:rPr lang="en-US" sz="1500" dirty="0">
-                <a:solidFill>
-                  <a:srgbClr val="5B6573"/>
-                </a:solidFill>
-                <a:latin typeface="Calibri" pitchFamily="34" charset="0"/>
-                <a:ea typeface="Calibri" pitchFamily="34" charset="-122"/>
-                <a:cs typeface="Calibri" pitchFamily="34" charset="-120"/>
-              </a:rPr>
-              <a:t>run all tests: 9 programs pass</a:t>
-            </a:r>
-            <a:endParaRPr lang="en-US" sz="1500" dirty="0"/>
+              <a:t>real GitHub failures reported before processing</a:t>
+            </a:r>
+            <a:endParaRPr lang="en-US" sz="1300" dirty="0"/>
           </a:p>
         </p:txBody>
       </p:sp>
@@ -4234,6 +4058,826 @@
 <file path=ppt/slides/slide13.xml><?xml version="1.0" encoding="utf-8"?>
 <p:sld xmlns:a="http://schemas.openxmlformats.org/drawingml/2006/main" xmlns:r="http://schemas.openxmlformats.org/officeDocument/2006/relationships" xmlns:p="http://schemas.openxmlformats.org/presentationml/2006/main">
   <p:cSld name="Slide 13">
+    <p:bg>
+      <p:bgPr>
+        <a:solidFill>
+          <a:srgbClr val="FFFFFF"/>
+        </a:solidFill>
+      </p:bgPr>
+    </p:bg>
+    <p:spTree>
+      <p:nvGrpSpPr>
+        <p:cNvPr id="1" name=""/>
+        <p:cNvGrpSpPr/>
+        <p:nvPr/>
+      </p:nvGrpSpPr>
+      <p:grpSpPr>
+        <a:xfrm>
+          <a:off x="0" y="0"/>
+          <a:ext cx="0" cy="0"/>
+          <a:chOff x="0" y="0"/>
+          <a:chExt cx="0" cy="0"/>
+        </a:xfrm>
+      </p:grpSpPr>
+      <p:sp>
+        <p:nvSpPr>
+          <p:cNvPr id="2" name="Text 0"/>
+          <p:cNvSpPr txBox="1"/>
+          <p:nvPr/>
+        </p:nvSpPr>
+        <p:spPr>
+          <a:xfrm>
+            <a:off x="8412480" y="4754880"/>
+            <a:ext cx="365760" cy="228600"/>
+          </a:xfrm>
+          <a:prstGeom prst="rect">
+            <a:avLst/>
+          </a:prstGeom>
+          <a:noFill/>
+          <a:ln/>
+        </p:spPr>
+        <p:txBody>
+          <a:bodyPr wrap="square" lIns="0" tIns="0" rIns="0" bIns="0" rtlCol="0" anchor="ctr"/>
+          <a:lstStyle/>
+          <a:p>
+            <a:pPr algn="r" indent="0" marL="0">
+              <a:buNone/>
+            </a:pPr>
+            <a:r>
+              <a:rPr lang="en-US" sz="1000" dirty="0">
+                <a:solidFill>
+                  <a:srgbClr val="5B6573"/>
+                </a:solidFill>
+                <a:latin typeface="Calibri" pitchFamily="34" charset="0"/>
+                <a:ea typeface="Calibri" pitchFamily="34" charset="-122"/>
+                <a:cs typeface="Calibri" pitchFamily="34" charset="-120"/>
+              </a:rPr>
+              <a:t>13</a:t>
+            </a:r>
+            <a:endParaRPr lang="en-US" sz="1000" dirty="0"/>
+          </a:p>
+        </p:txBody>
+      </p:sp>
+      <p:sp>
+        <p:nvSpPr>
+          <p:cNvPr id="3" name="Text 1"/>
+          <p:cNvSpPr txBox="1"/>
+          <p:nvPr/>
+        </p:nvSpPr>
+        <p:spPr>
+          <a:xfrm>
+            <a:off x="457200" y="320040"/>
+            <a:ext cx="8229600" cy="548640"/>
+          </a:xfrm>
+          <a:prstGeom prst="rect">
+            <a:avLst/>
+          </a:prstGeom>
+          <a:noFill/>
+          <a:ln/>
+        </p:spPr>
+        <p:txBody>
+          <a:bodyPr wrap="square" lIns="0" tIns="0" rIns="0" bIns="0" rtlCol="0" anchor="ctr"/>
+          <a:lstStyle/>
+          <a:p>
+            <a:pPr indent="0" marL="0">
+              <a:buNone/>
+            </a:pPr>
+            <a:r>
+              <a:rPr lang="en-US" sz="2800" b="1" dirty="0">
+                <a:solidFill>
+                  <a:srgbClr val="1B2430"/>
+                </a:solidFill>
+                <a:latin typeface="Cambria" pitchFamily="34" charset="0"/>
+                <a:ea typeface="Cambria" pitchFamily="34" charset="-122"/>
+                <a:cs typeface="Cambria" pitchFamily="34" charset="-120"/>
+              </a:rPr>
+              <a:t>Demonstration</a:t>
+            </a:r>
+            <a:endParaRPr lang="en-US" sz="2800" dirty="0"/>
+          </a:p>
+        </p:txBody>
+      </p:sp>
+      <p:sp>
+        <p:nvSpPr>
+          <p:cNvPr id="4" name="Shape 2"/>
+          <p:cNvSpPr/>
+          <p:nvPr/>
+        </p:nvSpPr>
+        <p:spPr>
+          <a:xfrm>
+            <a:off x="457200" y="1097280"/>
+            <a:ext cx="384048" cy="384048"/>
+          </a:xfrm>
+          <a:prstGeom prst="ellipse">
+            <a:avLst/>
+          </a:prstGeom>
+          <a:solidFill>
+            <a:srgbClr val="E8A33D"/>
+          </a:solidFill>
+          <a:ln w="12700">
+            <a:solidFill>
+              <a:srgbClr val="E8A33D"/>
+            </a:solidFill>
+            <a:prstDash val="solid"/>
+          </a:ln>
+        </p:spPr>
+      </p:sp>
+      <p:sp>
+        <p:nvSpPr>
+          <p:cNvPr id="5" name="Text 3"/>
+          <p:cNvSpPr txBox="1"/>
+          <p:nvPr/>
+        </p:nvSpPr>
+        <p:spPr>
+          <a:xfrm>
+            <a:off x="457200" y="1097280"/>
+            <a:ext cx="384048" cy="384048"/>
+          </a:xfrm>
+          <a:prstGeom prst="rect">
+            <a:avLst/>
+          </a:prstGeom>
+          <a:noFill/>
+          <a:ln/>
+        </p:spPr>
+        <p:txBody>
+          <a:bodyPr wrap="square" lIns="0" tIns="0" rIns="0" bIns="0" rtlCol="0" anchor="ctr"/>
+          <a:lstStyle/>
+          <a:p>
+            <a:pPr algn="ctr" indent="0" marL="0">
+              <a:buNone/>
+            </a:pPr>
+            <a:r>
+              <a:rPr lang="en-US" sz="1400" b="1" dirty="0">
+                <a:solidFill>
+                  <a:srgbClr val="1B2430"/>
+                </a:solidFill>
+                <a:latin typeface="Calibri" pitchFamily="34" charset="0"/>
+                <a:ea typeface="Calibri" pitchFamily="34" charset="-122"/>
+                <a:cs typeface="Calibri" pitchFamily="34" charset="-120"/>
+              </a:rPr>
+              <a:t>1</a:t>
+            </a:r>
+            <a:endParaRPr lang="en-US" sz="1400" dirty="0"/>
+          </a:p>
+        </p:txBody>
+      </p:sp>
+      <p:sp>
+        <p:nvSpPr>
+          <p:cNvPr id="6" name="Text 4"/>
+          <p:cNvSpPr txBox="1"/>
+          <p:nvPr/>
+        </p:nvSpPr>
+        <p:spPr>
+          <a:xfrm>
+            <a:off x="1005840" y="1133856"/>
+            <a:ext cx="2194560" cy="320040"/>
+          </a:xfrm>
+          <a:prstGeom prst="rect">
+            <a:avLst/>
+          </a:prstGeom>
+          <a:noFill/>
+          <a:ln/>
+        </p:spPr>
+        <p:txBody>
+          <a:bodyPr wrap="square" lIns="0" tIns="0" rIns="0" bIns="0" rtlCol="0" anchor="ctr"/>
+          <a:lstStyle/>
+          <a:p>
+            <a:pPr indent="0" marL="0">
+              <a:buNone/>
+            </a:pPr>
+            <a:r>
+              <a:rPr lang="en-US" sz="1600" b="1" dirty="0">
+                <a:solidFill>
+                  <a:srgbClr val="1B2430"/>
+                </a:solidFill>
+                <a:latin typeface="Calibri" pitchFamily="34" charset="0"/>
+                <a:ea typeface="Calibri" pitchFamily="34" charset="-122"/>
+                <a:cs typeface="Calibri" pitchFamily="34" charset="-120"/>
+              </a:rPr>
+              <a:t>Build</a:t>
+            </a:r>
+            <a:endParaRPr lang="en-US" sz="1600" dirty="0"/>
+          </a:p>
+        </p:txBody>
+      </p:sp>
+      <p:sp>
+        <p:nvSpPr>
+          <p:cNvPr id="7" name="Text 5"/>
+          <p:cNvSpPr txBox="1"/>
+          <p:nvPr/>
+        </p:nvSpPr>
+        <p:spPr>
+          <a:xfrm>
+            <a:off x="3200400" y="1133856"/>
+            <a:ext cx="5486400" cy="320040"/>
+          </a:xfrm>
+          <a:prstGeom prst="rect">
+            <a:avLst/>
+          </a:prstGeom>
+          <a:noFill/>
+          <a:ln/>
+        </p:spPr>
+        <p:txBody>
+          <a:bodyPr wrap="square" lIns="0" tIns="0" rIns="0" bIns="0" rtlCol="0" anchor="ctr"/>
+          <a:lstStyle/>
+          <a:p>
+            <a:pPr indent="0" marL="0">
+              <a:buNone/>
+            </a:pPr>
+            <a:r>
+              <a:rPr lang="en-US" sz="1500" dirty="0">
+                <a:solidFill>
+                  <a:srgbClr val="5B6573"/>
+                </a:solidFill>
+                <a:latin typeface="Calibri" pitchFamily="34" charset="0"/>
+                <a:ea typeface="Calibri" pitchFamily="34" charset="-122"/>
+                <a:cs typeface="Calibri" pitchFamily="34" charset="-120"/>
+              </a:rPr>
+              <a:t>Ctrl + Shift + B in VS Code</a:t>
+            </a:r>
+            <a:endParaRPr lang="en-US" sz="1500" dirty="0"/>
+          </a:p>
+        </p:txBody>
+      </p:sp>
+      <p:sp>
+        <p:nvSpPr>
+          <p:cNvPr id="8" name="Shape 6"/>
+          <p:cNvSpPr/>
+          <p:nvPr/>
+        </p:nvSpPr>
+        <p:spPr>
+          <a:xfrm>
+            <a:off x="457200" y="1810512"/>
+            <a:ext cx="384048" cy="384048"/>
+          </a:xfrm>
+          <a:prstGeom prst="ellipse">
+            <a:avLst/>
+          </a:prstGeom>
+          <a:solidFill>
+            <a:srgbClr val="E8A33D"/>
+          </a:solidFill>
+          <a:ln w="12700">
+            <a:solidFill>
+              <a:srgbClr val="E8A33D"/>
+            </a:solidFill>
+            <a:prstDash val="solid"/>
+          </a:ln>
+        </p:spPr>
+      </p:sp>
+      <p:sp>
+        <p:nvSpPr>
+          <p:cNvPr id="9" name="Text 7"/>
+          <p:cNvSpPr txBox="1"/>
+          <p:nvPr/>
+        </p:nvSpPr>
+        <p:spPr>
+          <a:xfrm>
+            <a:off x="457200" y="1810512"/>
+            <a:ext cx="384048" cy="384048"/>
+          </a:xfrm>
+          <a:prstGeom prst="rect">
+            <a:avLst/>
+          </a:prstGeom>
+          <a:noFill/>
+          <a:ln/>
+        </p:spPr>
+        <p:txBody>
+          <a:bodyPr wrap="square" lIns="0" tIns="0" rIns="0" bIns="0" rtlCol="0" anchor="ctr"/>
+          <a:lstStyle/>
+          <a:p>
+            <a:pPr algn="ctr" indent="0" marL="0">
+              <a:buNone/>
+            </a:pPr>
+            <a:r>
+              <a:rPr lang="en-US" sz="1400" b="1" dirty="0">
+                <a:solidFill>
+                  <a:srgbClr val="1B2430"/>
+                </a:solidFill>
+                <a:latin typeface="Calibri" pitchFamily="34" charset="0"/>
+                <a:ea typeface="Calibri" pitchFamily="34" charset="-122"/>
+                <a:cs typeface="Calibri" pitchFamily="34" charset="-120"/>
+              </a:rPr>
+              <a:t>2</a:t>
+            </a:r>
+            <a:endParaRPr lang="en-US" sz="1400" dirty="0"/>
+          </a:p>
+        </p:txBody>
+      </p:sp>
+      <p:sp>
+        <p:nvSpPr>
+          <p:cNvPr id="10" name="Text 8"/>
+          <p:cNvSpPr txBox="1"/>
+          <p:nvPr/>
+        </p:nvSpPr>
+        <p:spPr>
+          <a:xfrm>
+            <a:off x="1005840" y="1847088"/>
+            <a:ext cx="2194560" cy="320040"/>
+          </a:xfrm>
+          <a:prstGeom prst="rect">
+            <a:avLst/>
+          </a:prstGeom>
+          <a:noFill/>
+          <a:ln/>
+        </p:spPr>
+        <p:txBody>
+          <a:bodyPr wrap="square" lIns="0" tIns="0" rIns="0" bIns="0" rtlCol="0" anchor="ctr"/>
+          <a:lstStyle/>
+          <a:p>
+            <a:pPr indent="0" marL="0">
+              <a:buNone/>
+            </a:pPr>
+            <a:r>
+              <a:rPr lang="en-US" sz="1600" b="1" dirty="0">
+                <a:solidFill>
+                  <a:srgbClr val="1B2430"/>
+                </a:solidFill>
+                <a:latin typeface="Calibri" pitchFamily="34" charset="0"/>
+                <a:ea typeface="Calibri" pitchFamily="34" charset="-122"/>
+                <a:cs typeface="Calibri" pitchFamily="34" charset="-120"/>
+              </a:rPr>
+              <a:t>Compile and run</a:t>
+            </a:r>
+            <a:endParaRPr lang="en-US" sz="1600" dirty="0"/>
+          </a:p>
+        </p:txBody>
+      </p:sp>
+      <p:sp>
+        <p:nvSpPr>
+          <p:cNvPr id="11" name="Text 9"/>
+          <p:cNvSpPr txBox="1"/>
+          <p:nvPr/>
+        </p:nvSpPr>
+        <p:spPr>
+          <a:xfrm>
+            <a:off x="3200400" y="1847088"/>
+            <a:ext cx="5486400" cy="320040"/>
+          </a:xfrm>
+          <a:prstGeom prst="rect">
+            <a:avLst/>
+          </a:prstGeom>
+          <a:noFill/>
+          <a:ln/>
+        </p:spPr>
+        <p:txBody>
+          <a:bodyPr wrap="square" lIns="0" tIns="0" rIns="0" bIns="0" rtlCol="0" anchor="ctr"/>
+          <a:lstStyle/>
+          <a:p>
+            <a:pPr indent="0" marL="0">
+              <a:buNone/>
+            </a:pPr>
+            <a:r>
+              <a:rPr lang="en-US" sz="1500" dirty="0">
+                <a:solidFill>
+                  <a:srgbClr val="5B6573"/>
+                </a:solidFill>
+                <a:latin typeface="Calibri" pitchFamily="34" charset="0"/>
+                <a:ea typeface="Calibri" pitchFamily="34" charset="-122"/>
+                <a:cs typeface="Calibri" pitchFamily="34" charset="-120"/>
+              </a:rPr>
+              <a:t>students.prep: every phase, then the cleaned file</a:t>
+            </a:r>
+            <a:endParaRPr lang="en-US" sz="1500" dirty="0"/>
+          </a:p>
+        </p:txBody>
+      </p:sp>
+      <p:sp>
+        <p:nvSpPr>
+          <p:cNvPr id="12" name="Shape 10"/>
+          <p:cNvSpPr/>
+          <p:nvPr/>
+        </p:nvSpPr>
+        <p:spPr>
+          <a:xfrm>
+            <a:off x="457200" y="2523744"/>
+            <a:ext cx="384048" cy="384048"/>
+          </a:xfrm>
+          <a:prstGeom prst="ellipse">
+            <a:avLst/>
+          </a:prstGeom>
+          <a:solidFill>
+            <a:srgbClr val="E8A33D"/>
+          </a:solidFill>
+          <a:ln w="12700">
+            <a:solidFill>
+              <a:srgbClr val="E8A33D"/>
+            </a:solidFill>
+            <a:prstDash val="solid"/>
+          </a:ln>
+        </p:spPr>
+      </p:sp>
+      <p:sp>
+        <p:nvSpPr>
+          <p:cNvPr id="13" name="Text 11"/>
+          <p:cNvSpPr txBox="1"/>
+          <p:nvPr/>
+        </p:nvSpPr>
+        <p:spPr>
+          <a:xfrm>
+            <a:off x="457200" y="2523744"/>
+            <a:ext cx="384048" cy="384048"/>
+          </a:xfrm>
+          <a:prstGeom prst="rect">
+            <a:avLst/>
+          </a:prstGeom>
+          <a:noFill/>
+          <a:ln/>
+        </p:spPr>
+        <p:txBody>
+          <a:bodyPr wrap="square" lIns="0" tIns="0" rIns="0" bIns="0" rtlCol="0" anchor="ctr"/>
+          <a:lstStyle/>
+          <a:p>
+            <a:pPr algn="ctr" indent="0" marL="0">
+              <a:buNone/>
+            </a:pPr>
+            <a:r>
+              <a:rPr lang="en-US" sz="1400" b="1" dirty="0">
+                <a:solidFill>
+                  <a:srgbClr val="1B2430"/>
+                </a:solidFill>
+                <a:latin typeface="Calibri" pitchFamily="34" charset="0"/>
+                <a:ea typeface="Calibri" pitchFamily="34" charset="-122"/>
+                <a:cs typeface="Calibri" pitchFamily="34" charset="-120"/>
+              </a:rPr>
+              <a:t>3</a:t>
+            </a:r>
+            <a:endParaRPr lang="en-US" sz="1400" dirty="0"/>
+          </a:p>
+        </p:txBody>
+      </p:sp>
+      <p:sp>
+        <p:nvSpPr>
+          <p:cNvPr id="14" name="Text 12"/>
+          <p:cNvSpPr txBox="1"/>
+          <p:nvPr/>
+        </p:nvSpPr>
+        <p:spPr>
+          <a:xfrm>
+            <a:off x="1005840" y="2560320"/>
+            <a:ext cx="2194560" cy="320040"/>
+          </a:xfrm>
+          <a:prstGeom prst="rect">
+            <a:avLst/>
+          </a:prstGeom>
+          <a:noFill/>
+          <a:ln/>
+        </p:spPr>
+        <p:txBody>
+          <a:bodyPr wrap="square" lIns="0" tIns="0" rIns="0" bIns="0" rtlCol="0" anchor="ctr"/>
+          <a:lstStyle/>
+          <a:p>
+            <a:pPr indent="0" marL="0">
+              <a:buNone/>
+            </a:pPr>
+            <a:r>
+              <a:rPr lang="en-US" sz="1600" b="1" dirty="0">
+                <a:solidFill>
+                  <a:srgbClr val="1B2430"/>
+                </a:solidFill>
+                <a:latin typeface="Calibri" pitchFamily="34" charset="0"/>
+                <a:ea typeface="Calibri" pitchFamily="34" charset="-122"/>
+                <a:cs typeface="Calibri" pitchFamily="34" charset="-120"/>
+              </a:rPr>
+              <a:t>See the errors</a:t>
+            </a:r>
+            <a:endParaRPr lang="en-US" sz="1600" dirty="0"/>
+          </a:p>
+        </p:txBody>
+      </p:sp>
+      <p:sp>
+        <p:nvSpPr>
+          <p:cNvPr id="15" name="Text 13"/>
+          <p:cNvSpPr txBox="1"/>
+          <p:nvPr/>
+        </p:nvSpPr>
+        <p:spPr>
+          <a:xfrm>
+            <a:off x="3200400" y="2560320"/>
+            <a:ext cx="5486400" cy="320040"/>
+          </a:xfrm>
+          <a:prstGeom prst="rect">
+            <a:avLst/>
+          </a:prstGeom>
+          <a:noFill/>
+          <a:ln/>
+        </p:spPr>
+        <p:txBody>
+          <a:bodyPr wrap="square" lIns="0" tIns="0" rIns="0" bIns="0" rtlCol="0" anchor="ctr"/>
+          <a:lstStyle/>
+          <a:p>
+            <a:pPr indent="0" marL="0">
+              <a:buNone/>
+            </a:pPr>
+            <a:r>
+              <a:rPr lang="en-US" sz="1500" dirty="0">
+                <a:solidFill>
+                  <a:srgbClr val="5B6573"/>
+                </a:solidFill>
+                <a:latin typeface="Calibri" pitchFamily="34" charset="0"/>
+                <a:ea typeface="Calibri" pitchFamily="34" charset="-122"/>
+                <a:cs typeface="Calibri" pitchFamily="34" charset="-120"/>
+              </a:rPr>
+              <a:t>examples/errors: line, caret and hint</a:t>
+            </a:r>
+            <a:endParaRPr lang="en-US" sz="1500" dirty="0"/>
+          </a:p>
+        </p:txBody>
+      </p:sp>
+      <p:sp>
+        <p:nvSpPr>
+          <p:cNvPr id="16" name="Shape 14"/>
+          <p:cNvSpPr/>
+          <p:nvPr/>
+        </p:nvSpPr>
+        <p:spPr>
+          <a:xfrm>
+            <a:off x="457200" y="3236976"/>
+            <a:ext cx="384048" cy="384048"/>
+          </a:xfrm>
+          <a:prstGeom prst="ellipse">
+            <a:avLst/>
+          </a:prstGeom>
+          <a:solidFill>
+            <a:srgbClr val="E8A33D"/>
+          </a:solidFill>
+          <a:ln w="12700">
+            <a:solidFill>
+              <a:srgbClr val="E8A33D"/>
+            </a:solidFill>
+            <a:prstDash val="solid"/>
+          </a:ln>
+        </p:spPr>
+      </p:sp>
+      <p:sp>
+        <p:nvSpPr>
+          <p:cNvPr id="17" name="Text 15"/>
+          <p:cNvSpPr txBox="1"/>
+          <p:nvPr/>
+        </p:nvSpPr>
+        <p:spPr>
+          <a:xfrm>
+            <a:off x="457200" y="3236976"/>
+            <a:ext cx="384048" cy="384048"/>
+          </a:xfrm>
+          <a:prstGeom prst="rect">
+            <a:avLst/>
+          </a:prstGeom>
+          <a:noFill/>
+          <a:ln/>
+        </p:spPr>
+        <p:txBody>
+          <a:bodyPr wrap="square" lIns="0" tIns="0" rIns="0" bIns="0" rtlCol="0" anchor="ctr"/>
+          <a:lstStyle/>
+          <a:p>
+            <a:pPr algn="ctr" indent="0" marL="0">
+              <a:buNone/>
+            </a:pPr>
+            <a:r>
+              <a:rPr lang="en-US" sz="1400" b="1" dirty="0">
+                <a:solidFill>
+                  <a:srgbClr val="1B2430"/>
+                </a:solidFill>
+                <a:latin typeface="Calibri" pitchFamily="34" charset="0"/>
+                <a:ea typeface="Calibri" pitchFamily="34" charset="-122"/>
+                <a:cs typeface="Calibri" pitchFamily="34" charset="-120"/>
+              </a:rPr>
+              <a:t>4</a:t>
+            </a:r>
+            <a:endParaRPr lang="en-US" sz="1400" dirty="0"/>
+          </a:p>
+        </p:txBody>
+      </p:sp>
+      <p:sp>
+        <p:nvSpPr>
+          <p:cNvPr id="18" name="Text 16"/>
+          <p:cNvSpPr txBox="1"/>
+          <p:nvPr/>
+        </p:nvSpPr>
+        <p:spPr>
+          <a:xfrm>
+            <a:off x="1005840" y="3273552"/>
+            <a:ext cx="2194560" cy="320040"/>
+          </a:xfrm>
+          <a:prstGeom prst="rect">
+            <a:avLst/>
+          </a:prstGeom>
+          <a:noFill/>
+          <a:ln/>
+        </p:spPr>
+        <p:txBody>
+          <a:bodyPr wrap="square" lIns="0" tIns="0" rIns="0" bIns="0" rtlCol="0" anchor="ctr"/>
+          <a:lstStyle/>
+          <a:p>
+            <a:pPr indent="0" marL="0">
+              <a:buNone/>
+            </a:pPr>
+            <a:r>
+              <a:rPr lang="en-US" sz="1600" b="1" dirty="0">
+                <a:solidFill>
+                  <a:srgbClr val="1B2430"/>
+                </a:solidFill>
+                <a:latin typeface="Calibri" pitchFamily="34" charset="0"/>
+                <a:ea typeface="Calibri" pitchFamily="34" charset="-122"/>
+                <a:cs typeface="Calibri" pitchFamily="34" charset="-120"/>
+              </a:rPr>
+              <a:t>Certificate</a:t>
+            </a:r>
+            <a:endParaRPr lang="en-US" sz="1600" dirty="0"/>
+          </a:p>
+        </p:txBody>
+      </p:sp>
+      <p:sp>
+        <p:nvSpPr>
+          <p:cNvPr id="19" name="Text 17"/>
+          <p:cNvSpPr txBox="1"/>
+          <p:nvPr/>
+        </p:nvSpPr>
+        <p:spPr>
+          <a:xfrm>
+            <a:off x="3200400" y="3273552"/>
+            <a:ext cx="5486400" cy="320040"/>
+          </a:xfrm>
+          <a:prstGeom prst="rect">
+            <a:avLst/>
+          </a:prstGeom>
+          <a:noFill/>
+          <a:ln/>
+        </p:spPr>
+        <p:txBody>
+          <a:bodyPr wrap="square" lIns="0" tIns="0" rIns="0" bIns="0" rtlCol="0" anchor="ctr"/>
+          <a:lstStyle/>
+          <a:p>
+            <a:pPr indent="0" marL="0">
+              <a:buNone/>
+            </a:pPr>
+            <a:r>
+              <a:rPr lang="en-US" sz="1500" dirty="0">
+                <a:solidFill>
+                  <a:srgbClr val="5B6573"/>
+                </a:solidFill>
+                <a:latin typeface="Calibri" pitchFamily="34" charset="0"/>
+                <a:ea typeface="Calibri" pitchFamily="34" charset="-122"/>
+                <a:cs typeface="Calibri" pitchFamily="34" charset="-120"/>
+              </a:rPr>
+              <a:t>--certificate, then run on a new batch and a bad one</a:t>
+            </a:r>
+            <a:endParaRPr lang="en-US" sz="1500" dirty="0"/>
+          </a:p>
+        </p:txBody>
+      </p:sp>
+      <p:sp>
+        <p:nvSpPr>
+          <p:cNvPr id="20" name="Shape 18"/>
+          <p:cNvSpPr/>
+          <p:nvPr/>
+        </p:nvSpPr>
+        <p:spPr>
+          <a:xfrm>
+            <a:off x="457200" y="3950208"/>
+            <a:ext cx="384048" cy="384048"/>
+          </a:xfrm>
+          <a:prstGeom prst="ellipse">
+            <a:avLst/>
+          </a:prstGeom>
+          <a:solidFill>
+            <a:srgbClr val="E8A33D"/>
+          </a:solidFill>
+          <a:ln w="12700">
+            <a:solidFill>
+              <a:srgbClr val="E8A33D"/>
+            </a:solidFill>
+            <a:prstDash val="solid"/>
+          </a:ln>
+        </p:spPr>
+      </p:sp>
+      <p:sp>
+        <p:nvSpPr>
+          <p:cNvPr id="21" name="Text 19"/>
+          <p:cNvSpPr txBox="1"/>
+          <p:nvPr/>
+        </p:nvSpPr>
+        <p:spPr>
+          <a:xfrm>
+            <a:off x="457200" y="3950208"/>
+            <a:ext cx="384048" cy="384048"/>
+          </a:xfrm>
+          <a:prstGeom prst="rect">
+            <a:avLst/>
+          </a:prstGeom>
+          <a:noFill/>
+          <a:ln/>
+        </p:spPr>
+        <p:txBody>
+          <a:bodyPr wrap="square" lIns="0" tIns="0" rIns="0" bIns="0" rtlCol="0" anchor="ctr"/>
+          <a:lstStyle/>
+          <a:p>
+            <a:pPr algn="ctr" indent="0" marL="0">
+              <a:buNone/>
+            </a:pPr>
+            <a:r>
+              <a:rPr lang="en-US" sz="1400" b="1" dirty="0">
+                <a:solidFill>
+                  <a:srgbClr val="1B2430"/>
+                </a:solidFill>
+                <a:latin typeface="Calibri" pitchFamily="34" charset="0"/>
+                <a:ea typeface="Calibri" pitchFamily="34" charset="-122"/>
+                <a:cs typeface="Calibri" pitchFamily="34" charset="-120"/>
+              </a:rPr>
+              <a:t>5</a:t>
+            </a:r>
+            <a:endParaRPr lang="en-US" sz="1400" dirty="0"/>
+          </a:p>
+        </p:txBody>
+      </p:sp>
+      <p:sp>
+        <p:nvSpPr>
+          <p:cNvPr id="22" name="Text 20"/>
+          <p:cNvSpPr txBox="1"/>
+          <p:nvPr/>
+        </p:nvSpPr>
+        <p:spPr>
+          <a:xfrm>
+            <a:off x="1005840" y="3986784"/>
+            <a:ext cx="2194560" cy="320040"/>
+          </a:xfrm>
+          <a:prstGeom prst="rect">
+            <a:avLst/>
+          </a:prstGeom>
+          <a:noFill/>
+          <a:ln/>
+        </p:spPr>
+        <p:txBody>
+          <a:bodyPr wrap="square" lIns="0" tIns="0" rIns="0" bIns="0" rtlCol="0" anchor="ctr"/>
+          <a:lstStyle/>
+          <a:p>
+            <a:pPr indent="0" marL="0">
+              <a:buNone/>
+            </a:pPr>
+            <a:r>
+              <a:rPr lang="en-US" sz="1600" b="1" dirty="0">
+                <a:solidFill>
+                  <a:srgbClr val="1B2430"/>
+                </a:solidFill>
+                <a:latin typeface="Calibri" pitchFamily="34" charset="0"/>
+                <a:ea typeface="Calibri" pitchFamily="34" charset="-122"/>
+                <a:cs typeface="Calibri" pitchFamily="34" charset="-120"/>
+              </a:rPr>
+              <a:t>Tests</a:t>
+            </a:r>
+            <a:endParaRPr lang="en-US" sz="1600" dirty="0"/>
+          </a:p>
+        </p:txBody>
+      </p:sp>
+      <p:sp>
+        <p:nvSpPr>
+          <p:cNvPr id="23" name="Text 21"/>
+          <p:cNvSpPr txBox="1"/>
+          <p:nvPr/>
+        </p:nvSpPr>
+        <p:spPr>
+          <a:xfrm>
+            <a:off x="3200400" y="3986784"/>
+            <a:ext cx="5486400" cy="320040"/>
+          </a:xfrm>
+          <a:prstGeom prst="rect">
+            <a:avLst/>
+          </a:prstGeom>
+          <a:noFill/>
+          <a:ln/>
+        </p:spPr>
+        <p:txBody>
+          <a:bodyPr wrap="square" lIns="0" tIns="0" rIns="0" bIns="0" rtlCol="0" anchor="ctr"/>
+          <a:lstStyle/>
+          <a:p>
+            <a:pPr indent="0" marL="0">
+              <a:buNone/>
+            </a:pPr>
+            <a:r>
+              <a:rPr lang="en-US" sz="1500" dirty="0">
+                <a:solidFill>
+                  <a:srgbClr val="5B6573"/>
+                </a:solidFill>
+                <a:latin typeface="Calibri" pitchFamily="34" charset="0"/>
+                <a:ea typeface="Calibri" pitchFamily="34" charset="-122"/>
+                <a:cs typeface="Calibri" pitchFamily="34" charset="-120"/>
+              </a:rPr>
+              <a:t>run all tests: 9 programs pass</a:t>
+            </a:r>
+            <a:endParaRPr lang="en-US" sz="1500" dirty="0"/>
+          </a:p>
+        </p:txBody>
+      </p:sp>
+    </p:spTree>
+  </p:cSld>
+  <p:clrMapOvr>
+    <a:masterClrMapping/>
+  </p:clrMapOvr>
+</p:sld>
+</file>
+
+<file path=ppt/slides/slide14.xml><?xml version="1.0" encoding="utf-8"?>
+<p:sld xmlns:a="http://schemas.openxmlformats.org/drawingml/2006/main" xmlns:r="http://schemas.openxmlformats.org/officeDocument/2006/relationships" xmlns:p="http://schemas.openxmlformats.org/presentationml/2006/main">
+  <p:cSld name="Slide 14">
     <p:bg>
       <p:bgPr>
         <a:solidFill>
